--- a/template_exec_deck.pptx
+++ b/template_exec_deck.pptx
@@ -9,12 +9,12 @@
   </p:notesMasterIdLst>
   <p:sldIdLst>
     <p:sldId id="340" r:id="rId5"/>
-    <p:sldId id="341" r:id="rId6"/>
-    <p:sldId id="342" r:id="rId7"/>
-    <p:sldId id="343" r:id="rId8"/>
-    <p:sldId id="344" r:id="rId9"/>
-    <p:sldId id="345" r:id="rId10"/>
-    <p:sldId id="346" r:id="rId11"/>
+    <p:sldId id="347" r:id="rId6"/>
+    <p:sldId id="348" r:id="rId7"/>
+    <p:sldId id="349" r:id="rId8"/>
+    <p:sldId id="350" r:id="rId9"/>
+    <p:sldId id="351" r:id="rId10"/>
+    <p:sldId id="352" r:id="rId11"/>
   </p:sldIdLst>
   <p:sldSz cx="20104100" cy="11309350"/>
   <p:notesSz cx="20104100" cy="11309350"/>
@@ -1715,6 +1715,93 @@
           </a:prstGeom>
         </p:spPr>
       </p:pic>
+      <p:sp>
+        <p:nvSpPr>
+          <p:cNvPr id="4" name="Content Placeholder 3">
+            <a:extLst>
+              <a:ext uri="{FF2B5EF4-FFF2-40B4-BE49-F238E27FC236}">
+                <a16:creationId xmlns:a16="http://schemas.microsoft.com/office/drawing/2014/main" id="{24C12DC8-8B81-1278-7048-C6DC7A0B7559}"/>
+              </a:ext>
+            </a:extLst>
+          </p:cNvPr>
+          <p:cNvSpPr>
+            <a:spLocks noGrp="1"/>
+          </p:cNvSpPr>
+          <p:nvPr>
+            <p:ph sz="quarter" idx="10" hasCustomPrompt="1"/>
+          </p:nvPr>
+        </p:nvSpPr>
+        <p:spPr>
+          <a:xfrm>
+            <a:off x="2491907" y="358121"/>
+            <a:ext cx="7900987" cy="492443"/>
+          </a:xfrm>
+        </p:spPr>
+        <p:txBody>
+          <a:bodyPr/>
+          <a:lstStyle>
+            <a:lvl1pPr>
+              <a:defRPr lang="en-US" sz="3200" b="0" i="0" dirty="0" smtClean="0">
+                <a:solidFill>
+                  <a:srgbClr val="1300E2"/>
+                </a:solidFill>
+                <a:latin typeface="Arial Black"/>
+                <a:ea typeface="+mj-ea"/>
+                <a:cs typeface="Arial Black"/>
+              </a:defRPr>
+            </a:lvl1pPr>
+          </a:lstStyle>
+          <a:p>
+            <a:pPr lvl="0"/>
+            <a:r>
+              <a:rPr lang="en-US" dirty="0"/>
+              <a:t>Title Placeholder</a:t>
+            </a:r>
+          </a:p>
+        </p:txBody>
+      </p:sp>
+      <p:sp>
+        <p:nvSpPr>
+          <p:cNvPr id="6" name="Content Placeholder 5">
+            <a:extLst>
+              <a:ext uri="{FF2B5EF4-FFF2-40B4-BE49-F238E27FC236}">
+                <a16:creationId xmlns:a16="http://schemas.microsoft.com/office/drawing/2014/main" id="{C629E1E3-A41B-BB41-2378-00394606B28E}"/>
+              </a:ext>
+            </a:extLst>
+          </p:cNvPr>
+          <p:cNvSpPr>
+            <a:spLocks noGrp="1"/>
+          </p:cNvSpPr>
+          <p:nvPr>
+            <p:ph sz="quarter" idx="11" hasCustomPrompt="1"/>
+          </p:nvPr>
+        </p:nvSpPr>
+        <p:spPr>
+          <a:xfrm>
+            <a:off x="2491907" y="1692317"/>
+            <a:ext cx="7024687" cy="430887"/>
+          </a:xfrm>
+        </p:spPr>
+        <p:txBody>
+          <a:bodyPr/>
+          <a:lstStyle>
+            <a:lvl1pPr>
+              <a:defRPr sz="2800">
+                <a:latin typeface="Arial" panose="020B0604020202020204" pitchFamily="34" charset="0"/>
+                <a:cs typeface="Arial" panose="020B0604020202020204" pitchFamily="34" charset="0"/>
+              </a:defRPr>
+            </a:lvl1pPr>
+          </a:lstStyle>
+          <a:p>
+            <a:pPr lvl="0"/>
+            <a:r>
+              <a:rPr lang="en-US" dirty="0"/>
+              <a:t>Body Placeholder</a:t>
+            </a:r>
+            <a:endParaRPr lang="en-MY" dirty="0"/>
+          </a:p>
+        </p:txBody>
+      </p:sp>
     </p:spTree>
   </p:cSld>
   <p:clrMapOvr>
@@ -5655,13 +5742,7 @@
   <p:cSld>
     <p:spTree>
       <p:nvGrpSpPr>
-        <p:cNvPr id="1" name="">
-          <a:extLst>
-            <a:ext uri="{FF2B5EF4-FFF2-40B4-BE49-F238E27FC236}">
-              <a16:creationId xmlns:a16="http://schemas.microsoft.com/office/drawing/2014/main" id="{36F1F485-7022-03A3-3BEE-497F430314F2}"/>
-            </a:ext>
-          </a:extLst>
-        </p:cNvPr>
+        <p:cNvPr id="1" name=""/>
         <p:cNvGrpSpPr/>
         <p:nvPr/>
       </p:nvGrpSpPr>
@@ -5675,165 +5756,95 @@
       </p:grpSpPr>
       <p:sp>
         <p:nvSpPr>
-          <p:cNvPr id="3" name="object 9">
+          <p:cNvPr id="2" name="Slide Number Placeholder 1">
             <a:extLst>
               <a:ext uri="{FF2B5EF4-FFF2-40B4-BE49-F238E27FC236}">
-                <a16:creationId xmlns:a16="http://schemas.microsoft.com/office/drawing/2014/main" id="{15944745-F685-4561-DC2C-F197CA7FCE2F}"/>
+                <a16:creationId xmlns:a16="http://schemas.microsoft.com/office/drawing/2014/main" id="{5E57C093-A2E9-8D88-0A32-82AEF4938629}"/>
               </a:ext>
             </a:extLst>
           </p:cNvPr>
-          <p:cNvSpPr txBox="1"/>
-          <p:nvPr/>
+          <p:cNvSpPr>
+            <a:spLocks noGrp="1"/>
+          </p:cNvSpPr>
+          <p:nvPr>
+            <p:ph type="sldNum" sz="quarter" idx="7"/>
+          </p:nvPr>
         </p:nvSpPr>
-        <p:spPr>
-          <a:xfrm>
-            <a:off x="855172" y="1343535"/>
-            <a:ext cx="13327593" cy="477695"/>
-          </a:xfrm>
-          <a:prstGeom prst="rect">
-            <a:avLst/>
-          </a:prstGeom>
-        </p:spPr>
+        <p:spPr/>
         <p:txBody>
-          <a:bodyPr vert="horz" wrap="square" lIns="0" tIns="15875" rIns="0" bIns="0" rtlCol="0">
-            <a:spAutoFit/>
-          </a:bodyPr>
+          <a:bodyPr/>
           <a:lstStyle/>
           <a:p>
-            <a:pPr marL="12700">
-              <a:lnSpc>
-                <a:spcPct val="100000"/>
-              </a:lnSpc>
-              <a:spcBef>
-                <a:spcPts val="125"/>
-              </a:spcBef>
-            </a:pPr>
-            <a:r>
-              <a:rPr lang="en-MY" sz="3000" spc="-10" dirty="0">
+            <a:fld id="{B6F15528-21DE-4FAA-801E-634DDDAF4B2B}" type="slidenum">
+              <a:rPr lang="en-MY" smtClean="0">
                 <a:solidFill>
-                  <a:srgbClr val="1D1D1B"/>
+                  <a:schemeClr val="bg1"/>
                 </a:solidFill>
-                <a:latin typeface="Arial"/>
-                <a:cs typeface="Arial"/>
               </a:rPr>
-              <a:t>Body Placeholder</a:t>
-            </a:r>
+              <a:t>1</a:t>
+            </a:fld>
+            <a:endParaRPr lang="en-MY" dirty="0">
+              <a:solidFill>
+                <a:schemeClr val="bg1"/>
+              </a:solidFill>
+            </a:endParaRPr>
           </a:p>
         </p:txBody>
       </p:sp>
       <p:sp>
         <p:nvSpPr>
-          <p:cNvPr id="6" name="Slide Number Placeholder 1">
+          <p:cNvPr id="3" name="Content Placeholder 2">
             <a:extLst>
               <a:ext uri="{FF2B5EF4-FFF2-40B4-BE49-F238E27FC236}">
-                <a16:creationId xmlns:a16="http://schemas.microsoft.com/office/drawing/2014/main" id="{FE04FF35-E8FE-9DCD-0143-D84F0719FFDB}"/>
+                <a16:creationId xmlns:a16="http://schemas.microsoft.com/office/drawing/2014/main" id="{AC04A26F-C53D-CE5C-65BB-568A4B93E5D6}"/>
               </a:ext>
             </a:extLst>
           </p:cNvPr>
-          <p:cNvSpPr txBox="1">
-            <a:spLocks noGrp="1" noRot="1" noMove="1" noResize="1" noEditPoints="1" noAdjustHandles="1" noChangeArrowheads="1" noChangeShapeType="1"/>
+          <p:cNvSpPr>
+            <a:spLocks noGrp="1"/>
           </p:cNvSpPr>
-          <p:nvPr/>
+          <p:nvPr>
+            <p:ph sz="quarter" idx="10"/>
+          </p:nvPr>
         </p:nvSpPr>
-        <p:spPr>
-          <a:xfrm>
-            <a:off x="14474953" y="10517696"/>
-            <a:ext cx="4623943" cy="276999"/>
-          </a:xfrm>
-          <a:prstGeom prst="rect">
-            <a:avLst/>
-          </a:prstGeom>
-        </p:spPr>
+        <p:spPr/>
         <p:txBody>
-          <a:bodyPr wrap="square" lIns="0" tIns="0" rIns="0" bIns="0">
-            <a:spAutoFit/>
-          </a:bodyPr>
-          <a:lstStyle>
-            <a:defPPr>
-              <a:defRPr kern="0"/>
-            </a:defPPr>
-            <a:lvl1pPr algn="r">
-              <a:defRPr>
-                <a:solidFill>
-                  <a:schemeClr val="tx1">
-                    <a:tint val="75000"/>
-                  </a:schemeClr>
-                </a:solidFill>
-              </a:defRPr>
-            </a:lvl1pPr>
-          </a:lstStyle>
+          <a:bodyPr/>
+          <a:lstStyle/>
           <a:p>
-            <a:r>
-              <a:rPr lang="en-MY" dirty="0">
-                <a:solidFill>
-                  <a:srgbClr val="1500D9"/>
-                </a:solidFill>
-              </a:rPr>
-              <a:t>7</a:t>
-            </a:r>
+            <a:endParaRPr lang="en-MY"/>
           </a:p>
         </p:txBody>
       </p:sp>
       <p:sp>
         <p:nvSpPr>
-          <p:cNvPr id="4" name="object 35">
+          <p:cNvPr id="4" name="Content Placeholder 3">
             <a:extLst>
               <a:ext uri="{FF2B5EF4-FFF2-40B4-BE49-F238E27FC236}">
-                <a16:creationId xmlns:a16="http://schemas.microsoft.com/office/drawing/2014/main" id="{F2D075FD-FCAD-A038-8AB9-D67C88C05849}"/>
+                <a16:creationId xmlns:a16="http://schemas.microsoft.com/office/drawing/2014/main" id="{2345FB61-8E2D-410B-C5B5-4143ED8E2EEF}"/>
               </a:ext>
             </a:extLst>
           </p:cNvPr>
-          <p:cNvSpPr txBox="1">
-            <a:spLocks/>
+          <p:cNvSpPr>
+            <a:spLocks noGrp="1"/>
           </p:cNvSpPr>
-          <p:nvPr/>
+          <p:nvPr>
+            <p:ph sz="quarter" idx="11"/>
+          </p:nvPr>
         </p:nvSpPr>
-        <p:spPr>
-          <a:xfrm>
-            <a:off x="2213492" y="361714"/>
-            <a:ext cx="16755826" cy="506549"/>
-          </a:xfrm>
-          <a:prstGeom prst="rect">
-            <a:avLst/>
-          </a:prstGeom>
-        </p:spPr>
+        <p:spPr/>
         <p:txBody>
-          <a:bodyPr vert="horz" wrap="square" lIns="0" tIns="13970" rIns="0" bIns="0" rtlCol="0">
-            <a:spAutoFit/>
-          </a:bodyPr>
-          <a:lstStyle>
-            <a:lvl1pPr>
-              <a:defRPr sz="5350" b="0" i="0">
-                <a:solidFill>
-                  <a:srgbClr val="1300E2"/>
-                </a:solidFill>
-                <a:latin typeface="Arial Black"/>
-                <a:ea typeface="+mj-ea"/>
-                <a:cs typeface="Arial Black"/>
-              </a:defRPr>
-            </a:lvl1pPr>
-          </a:lstStyle>
+          <a:bodyPr/>
+          <a:lstStyle/>
           <a:p>
-            <a:pPr marL="12700">
-              <a:spcBef>
-                <a:spcPts val="110"/>
-              </a:spcBef>
-            </a:pPr>
-            <a:r>
-              <a:rPr lang="en-MY" sz="3200" dirty="0"/>
-              <a:t>Title Placeholder</a:t>
-            </a:r>
-            <a:endParaRPr lang="en-MY" sz="3200" b="1" spc="90" dirty="0">
-              <a:latin typeface="Arial Black" panose="020B0604020202020204" pitchFamily="34" charset="0"/>
-              <a:cs typeface="Arial Black" panose="020B0604020202020204" pitchFamily="34" charset="0"/>
-            </a:endParaRPr>
+            <a:endParaRPr lang="en-MY"/>
           </a:p>
         </p:txBody>
       </p:sp>
     </p:spTree>
     <p:extLst>
       <p:ext uri="{BB962C8B-B14F-4D97-AF65-F5344CB8AC3E}">
-        <p14:creationId xmlns:p14="http://schemas.microsoft.com/office/powerpoint/2010/main" val="910384249"/>
+        <p14:creationId xmlns:p14="http://schemas.microsoft.com/office/powerpoint/2010/main" val="3241384813"/>
       </p:ext>
     </p:extLst>
   </p:cSld>
@@ -5851,7 +5862,7 @@
         <p:cNvPr id="1" name="">
           <a:extLst>
             <a:ext uri="{FF2B5EF4-FFF2-40B4-BE49-F238E27FC236}">
-              <a16:creationId xmlns:a16="http://schemas.microsoft.com/office/drawing/2014/main" id="{C9A6CD6E-F975-DB52-58D5-4D6067A515B3}"/>
+              <a16:creationId xmlns:a16="http://schemas.microsoft.com/office/drawing/2014/main" id="{963E4D42-BADA-5B05-FF62-887E0873086F}"/>
             </a:ext>
           </a:extLst>
         </p:cNvPr>
@@ -5868,165 +5879,95 @@
       </p:grpSpPr>
       <p:sp>
         <p:nvSpPr>
-          <p:cNvPr id="3" name="object 9">
+          <p:cNvPr id="2" name="Slide Number Placeholder 1">
             <a:extLst>
               <a:ext uri="{FF2B5EF4-FFF2-40B4-BE49-F238E27FC236}">
-                <a16:creationId xmlns:a16="http://schemas.microsoft.com/office/drawing/2014/main" id="{070E447E-6C2C-E50F-9AAF-32A67F217EBD}"/>
+                <a16:creationId xmlns:a16="http://schemas.microsoft.com/office/drawing/2014/main" id="{D13CDB25-E1D3-FA97-A28E-74CC87F989B4}"/>
               </a:ext>
             </a:extLst>
           </p:cNvPr>
-          <p:cNvSpPr txBox="1"/>
-          <p:nvPr/>
+          <p:cNvSpPr>
+            <a:spLocks noGrp="1"/>
+          </p:cNvSpPr>
+          <p:nvPr>
+            <p:ph type="sldNum" sz="quarter" idx="7"/>
+          </p:nvPr>
         </p:nvSpPr>
-        <p:spPr>
-          <a:xfrm>
-            <a:off x="855172" y="1343535"/>
-            <a:ext cx="13327593" cy="477695"/>
-          </a:xfrm>
-          <a:prstGeom prst="rect">
-            <a:avLst/>
-          </a:prstGeom>
-        </p:spPr>
+        <p:spPr/>
         <p:txBody>
-          <a:bodyPr vert="horz" wrap="square" lIns="0" tIns="15875" rIns="0" bIns="0" rtlCol="0">
-            <a:spAutoFit/>
-          </a:bodyPr>
+          <a:bodyPr/>
           <a:lstStyle/>
           <a:p>
-            <a:pPr marL="12700">
-              <a:lnSpc>
-                <a:spcPct val="100000"/>
-              </a:lnSpc>
-              <a:spcBef>
-                <a:spcPts val="125"/>
-              </a:spcBef>
-            </a:pPr>
-            <a:r>
-              <a:rPr lang="en-MY" sz="3000" spc="-10" dirty="0">
+            <a:fld id="{B6F15528-21DE-4FAA-801E-634DDDAF4B2B}" type="slidenum">
+              <a:rPr lang="en-MY" smtClean="0">
                 <a:solidFill>
-                  <a:srgbClr val="1D1D1B"/>
+                  <a:schemeClr val="bg1"/>
                 </a:solidFill>
-                <a:latin typeface="Arial"/>
-                <a:cs typeface="Arial"/>
               </a:rPr>
-              <a:t>Body Placeholder</a:t>
-            </a:r>
+              <a:t>2</a:t>
+            </a:fld>
+            <a:endParaRPr lang="en-MY" dirty="0">
+              <a:solidFill>
+                <a:schemeClr val="bg1"/>
+              </a:solidFill>
+            </a:endParaRPr>
           </a:p>
         </p:txBody>
       </p:sp>
       <p:sp>
         <p:nvSpPr>
-          <p:cNvPr id="6" name="Slide Number Placeholder 1">
+          <p:cNvPr id="3" name="Content Placeholder 2">
             <a:extLst>
               <a:ext uri="{FF2B5EF4-FFF2-40B4-BE49-F238E27FC236}">
-                <a16:creationId xmlns:a16="http://schemas.microsoft.com/office/drawing/2014/main" id="{A1C96E80-9C61-41B4-9542-86B1BCEF7763}"/>
+                <a16:creationId xmlns:a16="http://schemas.microsoft.com/office/drawing/2014/main" id="{47370DF3-6D49-6B96-ACC1-6D7B80A939B0}"/>
               </a:ext>
             </a:extLst>
           </p:cNvPr>
-          <p:cNvSpPr txBox="1">
-            <a:spLocks noGrp="1" noRot="1" noMove="1" noResize="1" noEditPoints="1" noAdjustHandles="1" noChangeArrowheads="1" noChangeShapeType="1"/>
+          <p:cNvSpPr>
+            <a:spLocks noGrp="1"/>
           </p:cNvSpPr>
-          <p:nvPr/>
+          <p:nvPr>
+            <p:ph sz="quarter" idx="10"/>
+          </p:nvPr>
         </p:nvSpPr>
-        <p:spPr>
-          <a:xfrm>
-            <a:off x="14474953" y="10517696"/>
-            <a:ext cx="4623943" cy="276999"/>
-          </a:xfrm>
-          <a:prstGeom prst="rect">
-            <a:avLst/>
-          </a:prstGeom>
-        </p:spPr>
+        <p:spPr/>
         <p:txBody>
-          <a:bodyPr wrap="square" lIns="0" tIns="0" rIns="0" bIns="0">
-            <a:spAutoFit/>
-          </a:bodyPr>
-          <a:lstStyle>
-            <a:defPPr>
-              <a:defRPr kern="0"/>
-            </a:defPPr>
-            <a:lvl1pPr algn="r">
-              <a:defRPr>
-                <a:solidFill>
-                  <a:schemeClr val="tx1">
-                    <a:tint val="75000"/>
-                  </a:schemeClr>
-                </a:solidFill>
-              </a:defRPr>
-            </a:lvl1pPr>
-          </a:lstStyle>
+          <a:bodyPr/>
+          <a:lstStyle/>
           <a:p>
-            <a:r>
-              <a:rPr lang="en-MY" dirty="0">
-                <a:solidFill>
-                  <a:srgbClr val="1500D9"/>
-                </a:solidFill>
-              </a:rPr>
-              <a:t>7</a:t>
-            </a:r>
+            <a:endParaRPr lang="en-MY"/>
           </a:p>
         </p:txBody>
       </p:sp>
       <p:sp>
         <p:nvSpPr>
-          <p:cNvPr id="4" name="object 35">
+          <p:cNvPr id="4" name="Content Placeholder 3">
             <a:extLst>
               <a:ext uri="{FF2B5EF4-FFF2-40B4-BE49-F238E27FC236}">
-                <a16:creationId xmlns:a16="http://schemas.microsoft.com/office/drawing/2014/main" id="{89BC1310-517F-1343-113B-733062FC76C1}"/>
+                <a16:creationId xmlns:a16="http://schemas.microsoft.com/office/drawing/2014/main" id="{E702B322-37DB-9EB1-0603-5323233120F5}"/>
               </a:ext>
             </a:extLst>
           </p:cNvPr>
-          <p:cNvSpPr txBox="1">
-            <a:spLocks/>
+          <p:cNvSpPr>
+            <a:spLocks noGrp="1"/>
           </p:cNvSpPr>
-          <p:nvPr/>
+          <p:nvPr>
+            <p:ph sz="quarter" idx="11"/>
+          </p:nvPr>
         </p:nvSpPr>
-        <p:spPr>
-          <a:xfrm>
-            <a:off x="2213492" y="361714"/>
-            <a:ext cx="16755826" cy="506549"/>
-          </a:xfrm>
-          <a:prstGeom prst="rect">
-            <a:avLst/>
-          </a:prstGeom>
-        </p:spPr>
+        <p:spPr/>
         <p:txBody>
-          <a:bodyPr vert="horz" wrap="square" lIns="0" tIns="13970" rIns="0" bIns="0" rtlCol="0">
-            <a:spAutoFit/>
-          </a:bodyPr>
-          <a:lstStyle>
-            <a:lvl1pPr>
-              <a:defRPr sz="5350" b="0" i="0">
-                <a:solidFill>
-                  <a:srgbClr val="1300E2"/>
-                </a:solidFill>
-                <a:latin typeface="Arial Black"/>
-                <a:ea typeface="+mj-ea"/>
-                <a:cs typeface="Arial Black"/>
-              </a:defRPr>
-            </a:lvl1pPr>
-          </a:lstStyle>
+          <a:bodyPr/>
+          <a:lstStyle/>
           <a:p>
-            <a:pPr marL="12700">
-              <a:spcBef>
-                <a:spcPts val="110"/>
-              </a:spcBef>
-            </a:pPr>
-            <a:r>
-              <a:rPr lang="en-MY" sz="3200" dirty="0"/>
-              <a:t>Title Placeholder</a:t>
-            </a:r>
-            <a:endParaRPr lang="en-MY" sz="3200" b="1" spc="90" dirty="0">
-              <a:latin typeface="Arial Black" panose="020B0604020202020204" pitchFamily="34" charset="0"/>
-              <a:cs typeface="Arial Black" panose="020B0604020202020204" pitchFamily="34" charset="0"/>
-            </a:endParaRPr>
+            <a:endParaRPr lang="en-MY"/>
           </a:p>
         </p:txBody>
       </p:sp>
     </p:spTree>
     <p:extLst>
       <p:ext uri="{BB962C8B-B14F-4D97-AF65-F5344CB8AC3E}">
-        <p14:creationId xmlns:p14="http://schemas.microsoft.com/office/powerpoint/2010/main" val="1893235829"/>
+        <p14:creationId xmlns:p14="http://schemas.microsoft.com/office/powerpoint/2010/main" val="3516959967"/>
       </p:ext>
     </p:extLst>
   </p:cSld>
@@ -6044,7 +5985,7 @@
         <p:cNvPr id="1" name="">
           <a:extLst>
             <a:ext uri="{FF2B5EF4-FFF2-40B4-BE49-F238E27FC236}">
-              <a16:creationId xmlns:a16="http://schemas.microsoft.com/office/drawing/2014/main" id="{81325B84-83CF-0502-444B-80B212FB84C3}"/>
+              <a16:creationId xmlns:a16="http://schemas.microsoft.com/office/drawing/2014/main" id="{6843D883-B245-7E72-2D63-F5285E2EDDD5}"/>
             </a:ext>
           </a:extLst>
         </p:cNvPr>
@@ -6061,165 +6002,95 @@
       </p:grpSpPr>
       <p:sp>
         <p:nvSpPr>
-          <p:cNvPr id="3" name="object 9">
+          <p:cNvPr id="2" name="Slide Number Placeholder 1">
             <a:extLst>
               <a:ext uri="{FF2B5EF4-FFF2-40B4-BE49-F238E27FC236}">
-                <a16:creationId xmlns:a16="http://schemas.microsoft.com/office/drawing/2014/main" id="{A2A4F828-87E0-5412-D0C6-6B0E175D8789}"/>
+                <a16:creationId xmlns:a16="http://schemas.microsoft.com/office/drawing/2014/main" id="{BEC02E2B-6078-AE2B-3603-3B3447C617B7}"/>
               </a:ext>
             </a:extLst>
           </p:cNvPr>
-          <p:cNvSpPr txBox="1"/>
-          <p:nvPr/>
+          <p:cNvSpPr>
+            <a:spLocks noGrp="1"/>
+          </p:cNvSpPr>
+          <p:nvPr>
+            <p:ph type="sldNum" sz="quarter" idx="7"/>
+          </p:nvPr>
         </p:nvSpPr>
-        <p:spPr>
-          <a:xfrm>
-            <a:off x="855172" y="1343535"/>
-            <a:ext cx="13327593" cy="477695"/>
-          </a:xfrm>
-          <a:prstGeom prst="rect">
-            <a:avLst/>
-          </a:prstGeom>
-        </p:spPr>
+        <p:spPr/>
         <p:txBody>
-          <a:bodyPr vert="horz" wrap="square" lIns="0" tIns="15875" rIns="0" bIns="0" rtlCol="0">
-            <a:spAutoFit/>
-          </a:bodyPr>
+          <a:bodyPr/>
           <a:lstStyle/>
           <a:p>
-            <a:pPr marL="12700">
-              <a:lnSpc>
-                <a:spcPct val="100000"/>
-              </a:lnSpc>
-              <a:spcBef>
-                <a:spcPts val="125"/>
-              </a:spcBef>
-            </a:pPr>
-            <a:r>
-              <a:rPr lang="en-MY" sz="3000" spc="-10" dirty="0">
+            <a:fld id="{B6F15528-21DE-4FAA-801E-634DDDAF4B2B}" type="slidenum">
+              <a:rPr lang="en-MY" smtClean="0">
                 <a:solidFill>
-                  <a:srgbClr val="1D1D1B"/>
+                  <a:schemeClr val="bg1"/>
                 </a:solidFill>
-                <a:latin typeface="Arial"/>
-                <a:cs typeface="Arial"/>
               </a:rPr>
-              <a:t>Body Placeholder</a:t>
-            </a:r>
+              <a:t>3</a:t>
+            </a:fld>
+            <a:endParaRPr lang="en-MY" dirty="0">
+              <a:solidFill>
+                <a:schemeClr val="bg1"/>
+              </a:solidFill>
+            </a:endParaRPr>
           </a:p>
         </p:txBody>
       </p:sp>
       <p:sp>
         <p:nvSpPr>
-          <p:cNvPr id="6" name="Slide Number Placeholder 1">
+          <p:cNvPr id="3" name="Content Placeholder 2">
             <a:extLst>
               <a:ext uri="{FF2B5EF4-FFF2-40B4-BE49-F238E27FC236}">
-                <a16:creationId xmlns:a16="http://schemas.microsoft.com/office/drawing/2014/main" id="{B6BFB7FD-E6D3-9492-CC47-89596E235408}"/>
+                <a16:creationId xmlns:a16="http://schemas.microsoft.com/office/drawing/2014/main" id="{32D85C1D-7551-3F83-B4F4-CFCE8C331606}"/>
               </a:ext>
             </a:extLst>
           </p:cNvPr>
-          <p:cNvSpPr txBox="1">
-            <a:spLocks noGrp="1" noRot="1" noMove="1" noResize="1" noEditPoints="1" noAdjustHandles="1" noChangeArrowheads="1" noChangeShapeType="1"/>
+          <p:cNvSpPr>
+            <a:spLocks noGrp="1"/>
           </p:cNvSpPr>
-          <p:nvPr/>
+          <p:nvPr>
+            <p:ph sz="quarter" idx="10"/>
+          </p:nvPr>
         </p:nvSpPr>
-        <p:spPr>
-          <a:xfrm>
-            <a:off x="14474953" y="10517696"/>
-            <a:ext cx="4623943" cy="276999"/>
-          </a:xfrm>
-          <a:prstGeom prst="rect">
-            <a:avLst/>
-          </a:prstGeom>
-        </p:spPr>
+        <p:spPr/>
         <p:txBody>
-          <a:bodyPr wrap="square" lIns="0" tIns="0" rIns="0" bIns="0">
-            <a:spAutoFit/>
-          </a:bodyPr>
-          <a:lstStyle>
-            <a:defPPr>
-              <a:defRPr kern="0"/>
-            </a:defPPr>
-            <a:lvl1pPr algn="r">
-              <a:defRPr>
-                <a:solidFill>
-                  <a:schemeClr val="tx1">
-                    <a:tint val="75000"/>
-                  </a:schemeClr>
-                </a:solidFill>
-              </a:defRPr>
-            </a:lvl1pPr>
-          </a:lstStyle>
+          <a:bodyPr/>
+          <a:lstStyle/>
           <a:p>
-            <a:r>
-              <a:rPr lang="en-MY" dirty="0">
-                <a:solidFill>
-                  <a:srgbClr val="1500D9"/>
-                </a:solidFill>
-              </a:rPr>
-              <a:t>7</a:t>
-            </a:r>
+            <a:endParaRPr lang="en-MY"/>
           </a:p>
         </p:txBody>
       </p:sp>
       <p:sp>
         <p:nvSpPr>
-          <p:cNvPr id="4" name="object 35">
+          <p:cNvPr id="4" name="Content Placeholder 3">
             <a:extLst>
               <a:ext uri="{FF2B5EF4-FFF2-40B4-BE49-F238E27FC236}">
-                <a16:creationId xmlns:a16="http://schemas.microsoft.com/office/drawing/2014/main" id="{B835F6F4-E75C-DCB5-3947-629276BBC8B6}"/>
+                <a16:creationId xmlns:a16="http://schemas.microsoft.com/office/drawing/2014/main" id="{6B7F4B09-2449-5709-D203-C2ACD0DE652B}"/>
               </a:ext>
             </a:extLst>
           </p:cNvPr>
-          <p:cNvSpPr txBox="1">
-            <a:spLocks/>
+          <p:cNvSpPr>
+            <a:spLocks noGrp="1"/>
           </p:cNvSpPr>
-          <p:nvPr/>
+          <p:nvPr>
+            <p:ph sz="quarter" idx="11"/>
+          </p:nvPr>
         </p:nvSpPr>
-        <p:spPr>
-          <a:xfrm>
-            <a:off x="2213492" y="361714"/>
-            <a:ext cx="16755826" cy="506549"/>
-          </a:xfrm>
-          <a:prstGeom prst="rect">
-            <a:avLst/>
-          </a:prstGeom>
-        </p:spPr>
+        <p:spPr/>
         <p:txBody>
-          <a:bodyPr vert="horz" wrap="square" lIns="0" tIns="13970" rIns="0" bIns="0" rtlCol="0">
-            <a:spAutoFit/>
-          </a:bodyPr>
-          <a:lstStyle>
-            <a:lvl1pPr>
-              <a:defRPr sz="5350" b="0" i="0">
-                <a:solidFill>
-                  <a:srgbClr val="1300E2"/>
-                </a:solidFill>
-                <a:latin typeface="Arial Black"/>
-                <a:ea typeface="+mj-ea"/>
-                <a:cs typeface="Arial Black"/>
-              </a:defRPr>
-            </a:lvl1pPr>
-          </a:lstStyle>
+          <a:bodyPr/>
+          <a:lstStyle/>
           <a:p>
-            <a:pPr marL="12700">
-              <a:spcBef>
-                <a:spcPts val="110"/>
-              </a:spcBef>
-            </a:pPr>
-            <a:r>
-              <a:rPr lang="en-MY" sz="3200" dirty="0"/>
-              <a:t>Title Placeholder</a:t>
-            </a:r>
-            <a:endParaRPr lang="en-MY" sz="3200" b="1" spc="90" dirty="0">
-              <a:latin typeface="Arial Black" panose="020B0604020202020204" pitchFamily="34" charset="0"/>
-              <a:cs typeface="Arial Black" panose="020B0604020202020204" pitchFamily="34" charset="0"/>
-            </a:endParaRPr>
+            <a:endParaRPr lang="en-MY"/>
           </a:p>
         </p:txBody>
       </p:sp>
     </p:spTree>
     <p:extLst>
       <p:ext uri="{BB962C8B-B14F-4D97-AF65-F5344CB8AC3E}">
-        <p14:creationId xmlns:p14="http://schemas.microsoft.com/office/powerpoint/2010/main" val="3082097675"/>
+        <p14:creationId xmlns:p14="http://schemas.microsoft.com/office/powerpoint/2010/main" val="809267700"/>
       </p:ext>
     </p:extLst>
   </p:cSld>
@@ -6237,7 +6108,7 @@
         <p:cNvPr id="1" name="">
           <a:extLst>
             <a:ext uri="{FF2B5EF4-FFF2-40B4-BE49-F238E27FC236}">
-              <a16:creationId xmlns:a16="http://schemas.microsoft.com/office/drawing/2014/main" id="{CA2A9149-4E61-932A-A16C-697F431E04E6}"/>
+              <a16:creationId xmlns:a16="http://schemas.microsoft.com/office/drawing/2014/main" id="{E272675E-D6AA-1A23-AD6B-F0C69072F552}"/>
             </a:ext>
           </a:extLst>
         </p:cNvPr>
@@ -6254,165 +6125,95 @@
       </p:grpSpPr>
       <p:sp>
         <p:nvSpPr>
-          <p:cNvPr id="3" name="object 9">
+          <p:cNvPr id="2" name="Slide Number Placeholder 1">
             <a:extLst>
               <a:ext uri="{FF2B5EF4-FFF2-40B4-BE49-F238E27FC236}">
-                <a16:creationId xmlns:a16="http://schemas.microsoft.com/office/drawing/2014/main" id="{CF53F82D-F5E9-2595-99C0-8B2C8C638B19}"/>
+                <a16:creationId xmlns:a16="http://schemas.microsoft.com/office/drawing/2014/main" id="{DD79A644-2AD0-AC55-F455-36E387BA720C}"/>
               </a:ext>
             </a:extLst>
           </p:cNvPr>
-          <p:cNvSpPr txBox="1"/>
-          <p:nvPr/>
+          <p:cNvSpPr>
+            <a:spLocks noGrp="1"/>
+          </p:cNvSpPr>
+          <p:nvPr>
+            <p:ph type="sldNum" sz="quarter" idx="7"/>
+          </p:nvPr>
         </p:nvSpPr>
-        <p:spPr>
-          <a:xfrm>
-            <a:off x="855172" y="1343535"/>
-            <a:ext cx="13327593" cy="477695"/>
-          </a:xfrm>
-          <a:prstGeom prst="rect">
-            <a:avLst/>
-          </a:prstGeom>
-        </p:spPr>
+        <p:spPr/>
         <p:txBody>
-          <a:bodyPr vert="horz" wrap="square" lIns="0" tIns="15875" rIns="0" bIns="0" rtlCol="0">
-            <a:spAutoFit/>
-          </a:bodyPr>
+          <a:bodyPr/>
           <a:lstStyle/>
           <a:p>
-            <a:pPr marL="12700">
-              <a:lnSpc>
-                <a:spcPct val="100000"/>
-              </a:lnSpc>
-              <a:spcBef>
-                <a:spcPts val="125"/>
-              </a:spcBef>
-            </a:pPr>
-            <a:r>
-              <a:rPr lang="en-MY" sz="3000" spc="-10" dirty="0">
+            <a:fld id="{B6F15528-21DE-4FAA-801E-634DDDAF4B2B}" type="slidenum">
+              <a:rPr lang="en-MY" smtClean="0">
                 <a:solidFill>
-                  <a:srgbClr val="1D1D1B"/>
+                  <a:schemeClr val="bg1"/>
                 </a:solidFill>
-                <a:latin typeface="Arial"/>
-                <a:cs typeface="Arial"/>
               </a:rPr>
-              <a:t>Body Placeholder</a:t>
-            </a:r>
+              <a:t>4</a:t>
+            </a:fld>
+            <a:endParaRPr lang="en-MY" dirty="0">
+              <a:solidFill>
+                <a:schemeClr val="bg1"/>
+              </a:solidFill>
+            </a:endParaRPr>
           </a:p>
         </p:txBody>
       </p:sp>
       <p:sp>
         <p:nvSpPr>
-          <p:cNvPr id="6" name="Slide Number Placeholder 1">
+          <p:cNvPr id="3" name="Content Placeholder 2">
             <a:extLst>
               <a:ext uri="{FF2B5EF4-FFF2-40B4-BE49-F238E27FC236}">
-                <a16:creationId xmlns:a16="http://schemas.microsoft.com/office/drawing/2014/main" id="{0EE7D295-20B8-3FEA-BADF-134303A2D8F3}"/>
+                <a16:creationId xmlns:a16="http://schemas.microsoft.com/office/drawing/2014/main" id="{2722DF9E-F1A0-830F-728A-1FFD4D3BEE8B}"/>
               </a:ext>
             </a:extLst>
           </p:cNvPr>
-          <p:cNvSpPr txBox="1">
-            <a:spLocks noGrp="1" noRot="1" noMove="1" noResize="1" noEditPoints="1" noAdjustHandles="1" noChangeArrowheads="1" noChangeShapeType="1"/>
+          <p:cNvSpPr>
+            <a:spLocks noGrp="1"/>
           </p:cNvSpPr>
-          <p:nvPr/>
+          <p:nvPr>
+            <p:ph sz="quarter" idx="10"/>
+          </p:nvPr>
         </p:nvSpPr>
-        <p:spPr>
-          <a:xfrm>
-            <a:off x="14474953" y="10517696"/>
-            <a:ext cx="4623943" cy="276999"/>
-          </a:xfrm>
-          <a:prstGeom prst="rect">
-            <a:avLst/>
-          </a:prstGeom>
-        </p:spPr>
+        <p:spPr/>
         <p:txBody>
-          <a:bodyPr wrap="square" lIns="0" tIns="0" rIns="0" bIns="0">
-            <a:spAutoFit/>
-          </a:bodyPr>
-          <a:lstStyle>
-            <a:defPPr>
-              <a:defRPr kern="0"/>
-            </a:defPPr>
-            <a:lvl1pPr algn="r">
-              <a:defRPr>
-                <a:solidFill>
-                  <a:schemeClr val="tx1">
-                    <a:tint val="75000"/>
-                  </a:schemeClr>
-                </a:solidFill>
-              </a:defRPr>
-            </a:lvl1pPr>
-          </a:lstStyle>
+          <a:bodyPr/>
+          <a:lstStyle/>
           <a:p>
-            <a:r>
-              <a:rPr lang="en-MY" dirty="0">
-                <a:solidFill>
-                  <a:srgbClr val="1500D9"/>
-                </a:solidFill>
-              </a:rPr>
-              <a:t>7</a:t>
-            </a:r>
+            <a:endParaRPr lang="en-MY"/>
           </a:p>
         </p:txBody>
       </p:sp>
       <p:sp>
         <p:nvSpPr>
-          <p:cNvPr id="4" name="object 35">
+          <p:cNvPr id="4" name="Content Placeholder 3">
             <a:extLst>
               <a:ext uri="{FF2B5EF4-FFF2-40B4-BE49-F238E27FC236}">
-                <a16:creationId xmlns:a16="http://schemas.microsoft.com/office/drawing/2014/main" id="{22C4BD09-0C41-56A7-90D6-6B7BE2E525C0}"/>
+                <a16:creationId xmlns:a16="http://schemas.microsoft.com/office/drawing/2014/main" id="{2230F2E2-D1C2-BD64-67A9-D3EC35A409C8}"/>
               </a:ext>
             </a:extLst>
           </p:cNvPr>
-          <p:cNvSpPr txBox="1">
-            <a:spLocks/>
+          <p:cNvSpPr>
+            <a:spLocks noGrp="1"/>
           </p:cNvSpPr>
-          <p:nvPr/>
+          <p:nvPr>
+            <p:ph sz="quarter" idx="11"/>
+          </p:nvPr>
         </p:nvSpPr>
-        <p:spPr>
-          <a:xfrm>
-            <a:off x="2213492" y="361714"/>
-            <a:ext cx="16755826" cy="506549"/>
-          </a:xfrm>
-          <a:prstGeom prst="rect">
-            <a:avLst/>
-          </a:prstGeom>
-        </p:spPr>
+        <p:spPr/>
         <p:txBody>
-          <a:bodyPr vert="horz" wrap="square" lIns="0" tIns="13970" rIns="0" bIns="0" rtlCol="0">
-            <a:spAutoFit/>
-          </a:bodyPr>
-          <a:lstStyle>
-            <a:lvl1pPr>
-              <a:defRPr sz="5350" b="0" i="0">
-                <a:solidFill>
-                  <a:srgbClr val="1300E2"/>
-                </a:solidFill>
-                <a:latin typeface="Arial Black"/>
-                <a:ea typeface="+mj-ea"/>
-                <a:cs typeface="Arial Black"/>
-              </a:defRPr>
-            </a:lvl1pPr>
-          </a:lstStyle>
+          <a:bodyPr/>
+          <a:lstStyle/>
           <a:p>
-            <a:pPr marL="12700">
-              <a:spcBef>
-                <a:spcPts val="110"/>
-              </a:spcBef>
-            </a:pPr>
-            <a:r>
-              <a:rPr lang="en-MY" sz="3200" dirty="0"/>
-              <a:t>Title Placeholder</a:t>
-            </a:r>
-            <a:endParaRPr lang="en-MY" sz="3200" b="1" spc="90" dirty="0">
-              <a:latin typeface="Arial Black" panose="020B0604020202020204" pitchFamily="34" charset="0"/>
-              <a:cs typeface="Arial Black" panose="020B0604020202020204" pitchFamily="34" charset="0"/>
-            </a:endParaRPr>
+            <a:endParaRPr lang="en-MY"/>
           </a:p>
         </p:txBody>
       </p:sp>
     </p:spTree>
     <p:extLst>
       <p:ext uri="{BB962C8B-B14F-4D97-AF65-F5344CB8AC3E}">
-        <p14:creationId xmlns:p14="http://schemas.microsoft.com/office/powerpoint/2010/main" val="2439293172"/>
+        <p14:creationId xmlns:p14="http://schemas.microsoft.com/office/powerpoint/2010/main" val="3017724916"/>
       </p:ext>
     </p:extLst>
   </p:cSld>
@@ -6430,7 +6231,7 @@
         <p:cNvPr id="1" name="">
           <a:extLst>
             <a:ext uri="{FF2B5EF4-FFF2-40B4-BE49-F238E27FC236}">
-              <a16:creationId xmlns:a16="http://schemas.microsoft.com/office/drawing/2014/main" id="{A54FF5CE-42C0-0844-1992-E17A245D7B35}"/>
+              <a16:creationId xmlns:a16="http://schemas.microsoft.com/office/drawing/2014/main" id="{C86935A6-DDDF-F8A5-80CA-BBF05DB5027F}"/>
             </a:ext>
           </a:extLst>
         </p:cNvPr>
@@ -6447,165 +6248,95 @@
       </p:grpSpPr>
       <p:sp>
         <p:nvSpPr>
-          <p:cNvPr id="3" name="object 9">
+          <p:cNvPr id="2" name="Slide Number Placeholder 1">
             <a:extLst>
               <a:ext uri="{FF2B5EF4-FFF2-40B4-BE49-F238E27FC236}">
-                <a16:creationId xmlns:a16="http://schemas.microsoft.com/office/drawing/2014/main" id="{D0058801-2291-5E38-6C85-507FD99DACD0}"/>
+                <a16:creationId xmlns:a16="http://schemas.microsoft.com/office/drawing/2014/main" id="{EC0DD083-BC88-366E-9D04-599757A18A3D}"/>
               </a:ext>
             </a:extLst>
           </p:cNvPr>
-          <p:cNvSpPr txBox="1"/>
-          <p:nvPr/>
+          <p:cNvSpPr>
+            <a:spLocks noGrp="1"/>
+          </p:cNvSpPr>
+          <p:nvPr>
+            <p:ph type="sldNum" sz="quarter" idx="7"/>
+          </p:nvPr>
         </p:nvSpPr>
-        <p:spPr>
-          <a:xfrm>
-            <a:off x="855172" y="1343535"/>
-            <a:ext cx="13327593" cy="477695"/>
-          </a:xfrm>
-          <a:prstGeom prst="rect">
-            <a:avLst/>
-          </a:prstGeom>
-        </p:spPr>
+        <p:spPr/>
         <p:txBody>
-          <a:bodyPr vert="horz" wrap="square" lIns="0" tIns="15875" rIns="0" bIns="0" rtlCol="0">
-            <a:spAutoFit/>
-          </a:bodyPr>
+          <a:bodyPr/>
           <a:lstStyle/>
           <a:p>
-            <a:pPr marL="12700">
-              <a:lnSpc>
-                <a:spcPct val="100000"/>
-              </a:lnSpc>
-              <a:spcBef>
-                <a:spcPts val="125"/>
-              </a:spcBef>
-            </a:pPr>
-            <a:r>
-              <a:rPr lang="en-MY" sz="3000" spc="-10" dirty="0">
+            <a:fld id="{B6F15528-21DE-4FAA-801E-634DDDAF4B2B}" type="slidenum">
+              <a:rPr lang="en-MY" smtClean="0">
                 <a:solidFill>
-                  <a:srgbClr val="1D1D1B"/>
+                  <a:schemeClr val="bg1"/>
                 </a:solidFill>
-                <a:latin typeface="Arial"/>
-                <a:cs typeface="Arial"/>
               </a:rPr>
-              <a:t>Body Placeholder</a:t>
-            </a:r>
+              <a:t>5</a:t>
+            </a:fld>
+            <a:endParaRPr lang="en-MY" dirty="0">
+              <a:solidFill>
+                <a:schemeClr val="bg1"/>
+              </a:solidFill>
+            </a:endParaRPr>
           </a:p>
         </p:txBody>
       </p:sp>
       <p:sp>
         <p:nvSpPr>
-          <p:cNvPr id="6" name="Slide Number Placeholder 1">
+          <p:cNvPr id="3" name="Content Placeholder 2">
             <a:extLst>
               <a:ext uri="{FF2B5EF4-FFF2-40B4-BE49-F238E27FC236}">
-                <a16:creationId xmlns:a16="http://schemas.microsoft.com/office/drawing/2014/main" id="{95DB06A2-31B1-43A3-F65A-04A8F870B03B}"/>
+                <a16:creationId xmlns:a16="http://schemas.microsoft.com/office/drawing/2014/main" id="{3A0FDA82-6298-559B-6998-B9F742C7F382}"/>
               </a:ext>
             </a:extLst>
           </p:cNvPr>
-          <p:cNvSpPr txBox="1">
-            <a:spLocks noGrp="1" noRot="1" noMove="1" noResize="1" noEditPoints="1" noAdjustHandles="1" noChangeArrowheads="1" noChangeShapeType="1"/>
+          <p:cNvSpPr>
+            <a:spLocks noGrp="1"/>
           </p:cNvSpPr>
-          <p:nvPr/>
+          <p:nvPr>
+            <p:ph sz="quarter" idx="10"/>
+          </p:nvPr>
         </p:nvSpPr>
-        <p:spPr>
-          <a:xfrm>
-            <a:off x="14474953" y="10517696"/>
-            <a:ext cx="4623943" cy="276999"/>
-          </a:xfrm>
-          <a:prstGeom prst="rect">
-            <a:avLst/>
-          </a:prstGeom>
-        </p:spPr>
+        <p:spPr/>
         <p:txBody>
-          <a:bodyPr wrap="square" lIns="0" tIns="0" rIns="0" bIns="0">
-            <a:spAutoFit/>
-          </a:bodyPr>
-          <a:lstStyle>
-            <a:defPPr>
-              <a:defRPr kern="0"/>
-            </a:defPPr>
-            <a:lvl1pPr algn="r">
-              <a:defRPr>
-                <a:solidFill>
-                  <a:schemeClr val="tx1">
-                    <a:tint val="75000"/>
-                  </a:schemeClr>
-                </a:solidFill>
-              </a:defRPr>
-            </a:lvl1pPr>
-          </a:lstStyle>
+          <a:bodyPr/>
+          <a:lstStyle/>
           <a:p>
-            <a:r>
-              <a:rPr lang="en-MY" dirty="0">
-                <a:solidFill>
-                  <a:srgbClr val="1500D9"/>
-                </a:solidFill>
-              </a:rPr>
-              <a:t>7</a:t>
-            </a:r>
+            <a:endParaRPr lang="en-MY"/>
           </a:p>
         </p:txBody>
       </p:sp>
       <p:sp>
         <p:nvSpPr>
-          <p:cNvPr id="4" name="object 35">
+          <p:cNvPr id="4" name="Content Placeholder 3">
             <a:extLst>
               <a:ext uri="{FF2B5EF4-FFF2-40B4-BE49-F238E27FC236}">
-                <a16:creationId xmlns:a16="http://schemas.microsoft.com/office/drawing/2014/main" id="{0AAD7BC2-4DD9-5DAE-7885-A982F25BF207}"/>
+                <a16:creationId xmlns:a16="http://schemas.microsoft.com/office/drawing/2014/main" id="{9809ED4D-95CA-E94D-B8D5-EA16513C9B48}"/>
               </a:ext>
             </a:extLst>
           </p:cNvPr>
-          <p:cNvSpPr txBox="1">
-            <a:spLocks/>
+          <p:cNvSpPr>
+            <a:spLocks noGrp="1"/>
           </p:cNvSpPr>
-          <p:nvPr/>
+          <p:nvPr>
+            <p:ph sz="quarter" idx="11"/>
+          </p:nvPr>
         </p:nvSpPr>
-        <p:spPr>
-          <a:xfrm>
-            <a:off x="2213492" y="361714"/>
-            <a:ext cx="16755826" cy="506549"/>
-          </a:xfrm>
-          <a:prstGeom prst="rect">
-            <a:avLst/>
-          </a:prstGeom>
-        </p:spPr>
+        <p:spPr/>
         <p:txBody>
-          <a:bodyPr vert="horz" wrap="square" lIns="0" tIns="13970" rIns="0" bIns="0" rtlCol="0">
-            <a:spAutoFit/>
-          </a:bodyPr>
-          <a:lstStyle>
-            <a:lvl1pPr>
-              <a:defRPr sz="5350" b="0" i="0">
-                <a:solidFill>
-                  <a:srgbClr val="1300E2"/>
-                </a:solidFill>
-                <a:latin typeface="Arial Black"/>
-                <a:ea typeface="+mj-ea"/>
-                <a:cs typeface="Arial Black"/>
-              </a:defRPr>
-            </a:lvl1pPr>
-          </a:lstStyle>
+          <a:bodyPr/>
+          <a:lstStyle/>
           <a:p>
-            <a:pPr marL="12700">
-              <a:spcBef>
-                <a:spcPts val="110"/>
-              </a:spcBef>
-            </a:pPr>
-            <a:r>
-              <a:rPr lang="en-MY" sz="3200" dirty="0"/>
-              <a:t>Title Placeholder</a:t>
-            </a:r>
-            <a:endParaRPr lang="en-MY" sz="3200" b="1" spc="90" dirty="0">
-              <a:latin typeface="Arial Black" panose="020B0604020202020204" pitchFamily="34" charset="0"/>
-              <a:cs typeface="Arial Black" panose="020B0604020202020204" pitchFamily="34" charset="0"/>
-            </a:endParaRPr>
+            <a:endParaRPr lang="en-MY"/>
           </a:p>
         </p:txBody>
       </p:sp>
     </p:spTree>
     <p:extLst>
       <p:ext uri="{BB962C8B-B14F-4D97-AF65-F5344CB8AC3E}">
-        <p14:creationId xmlns:p14="http://schemas.microsoft.com/office/powerpoint/2010/main" val="1826806831"/>
+        <p14:creationId xmlns:p14="http://schemas.microsoft.com/office/powerpoint/2010/main" val="1288639858"/>
       </p:ext>
     </p:extLst>
   </p:cSld>
@@ -6623,7 +6354,7 @@
         <p:cNvPr id="1" name="">
           <a:extLst>
             <a:ext uri="{FF2B5EF4-FFF2-40B4-BE49-F238E27FC236}">
-              <a16:creationId xmlns:a16="http://schemas.microsoft.com/office/drawing/2014/main" id="{31CB9C1E-FBD5-4CA8-D8B4-9AC22AAE3213}"/>
+              <a16:creationId xmlns:a16="http://schemas.microsoft.com/office/drawing/2014/main" id="{83FFF546-7D12-A286-AAAD-A515967EE7D9}"/>
             </a:ext>
           </a:extLst>
         </p:cNvPr>
@@ -6640,165 +6371,95 @@
       </p:grpSpPr>
       <p:sp>
         <p:nvSpPr>
-          <p:cNvPr id="3" name="object 9">
+          <p:cNvPr id="2" name="Slide Number Placeholder 1">
             <a:extLst>
               <a:ext uri="{FF2B5EF4-FFF2-40B4-BE49-F238E27FC236}">
-                <a16:creationId xmlns:a16="http://schemas.microsoft.com/office/drawing/2014/main" id="{7759F695-27F5-FA56-5E25-FC9E24C1C694}"/>
+                <a16:creationId xmlns:a16="http://schemas.microsoft.com/office/drawing/2014/main" id="{87160B45-1288-C946-BC94-506729F18474}"/>
               </a:ext>
             </a:extLst>
           </p:cNvPr>
-          <p:cNvSpPr txBox="1"/>
-          <p:nvPr/>
+          <p:cNvSpPr>
+            <a:spLocks noGrp="1"/>
+          </p:cNvSpPr>
+          <p:nvPr>
+            <p:ph type="sldNum" sz="quarter" idx="7"/>
+          </p:nvPr>
         </p:nvSpPr>
-        <p:spPr>
-          <a:xfrm>
-            <a:off x="855172" y="1343535"/>
-            <a:ext cx="13327593" cy="477695"/>
-          </a:xfrm>
-          <a:prstGeom prst="rect">
-            <a:avLst/>
-          </a:prstGeom>
-        </p:spPr>
+        <p:spPr/>
         <p:txBody>
-          <a:bodyPr vert="horz" wrap="square" lIns="0" tIns="15875" rIns="0" bIns="0" rtlCol="0">
-            <a:spAutoFit/>
-          </a:bodyPr>
+          <a:bodyPr/>
           <a:lstStyle/>
           <a:p>
-            <a:pPr marL="12700">
-              <a:lnSpc>
-                <a:spcPct val="100000"/>
-              </a:lnSpc>
-              <a:spcBef>
-                <a:spcPts val="125"/>
-              </a:spcBef>
-            </a:pPr>
-            <a:r>
-              <a:rPr lang="en-MY" sz="3000" spc="-10" dirty="0">
+            <a:fld id="{B6F15528-21DE-4FAA-801E-634DDDAF4B2B}" type="slidenum">
+              <a:rPr lang="en-MY" smtClean="0">
                 <a:solidFill>
-                  <a:srgbClr val="1D1D1B"/>
+                  <a:schemeClr val="bg1"/>
                 </a:solidFill>
-                <a:latin typeface="Arial"/>
-                <a:cs typeface="Arial"/>
               </a:rPr>
-              <a:t>Body Placeholder</a:t>
-            </a:r>
+              <a:t>6</a:t>
+            </a:fld>
+            <a:endParaRPr lang="en-MY" dirty="0">
+              <a:solidFill>
+                <a:schemeClr val="bg1"/>
+              </a:solidFill>
+            </a:endParaRPr>
           </a:p>
         </p:txBody>
       </p:sp>
       <p:sp>
         <p:nvSpPr>
-          <p:cNvPr id="6" name="Slide Number Placeholder 1">
+          <p:cNvPr id="3" name="Content Placeholder 2">
             <a:extLst>
               <a:ext uri="{FF2B5EF4-FFF2-40B4-BE49-F238E27FC236}">
-                <a16:creationId xmlns:a16="http://schemas.microsoft.com/office/drawing/2014/main" id="{9EA1F559-6BB3-4A32-D23F-F15A54D52839}"/>
+                <a16:creationId xmlns:a16="http://schemas.microsoft.com/office/drawing/2014/main" id="{88D244C6-F8B4-9915-521C-BE3F6141F24F}"/>
               </a:ext>
             </a:extLst>
           </p:cNvPr>
-          <p:cNvSpPr txBox="1">
-            <a:spLocks noGrp="1" noRot="1" noMove="1" noResize="1" noEditPoints="1" noAdjustHandles="1" noChangeArrowheads="1" noChangeShapeType="1"/>
+          <p:cNvSpPr>
+            <a:spLocks noGrp="1"/>
           </p:cNvSpPr>
-          <p:nvPr/>
+          <p:nvPr>
+            <p:ph sz="quarter" idx="10"/>
+          </p:nvPr>
         </p:nvSpPr>
-        <p:spPr>
-          <a:xfrm>
-            <a:off x="14474953" y="10517696"/>
-            <a:ext cx="4623943" cy="276999"/>
-          </a:xfrm>
-          <a:prstGeom prst="rect">
-            <a:avLst/>
-          </a:prstGeom>
-        </p:spPr>
+        <p:spPr/>
         <p:txBody>
-          <a:bodyPr wrap="square" lIns="0" tIns="0" rIns="0" bIns="0">
-            <a:spAutoFit/>
-          </a:bodyPr>
-          <a:lstStyle>
-            <a:defPPr>
-              <a:defRPr kern="0"/>
-            </a:defPPr>
-            <a:lvl1pPr algn="r">
-              <a:defRPr>
-                <a:solidFill>
-                  <a:schemeClr val="tx1">
-                    <a:tint val="75000"/>
-                  </a:schemeClr>
-                </a:solidFill>
-              </a:defRPr>
-            </a:lvl1pPr>
-          </a:lstStyle>
+          <a:bodyPr/>
+          <a:lstStyle/>
           <a:p>
-            <a:r>
-              <a:rPr lang="en-MY" dirty="0">
-                <a:solidFill>
-                  <a:srgbClr val="1500D9"/>
-                </a:solidFill>
-              </a:rPr>
-              <a:t>7</a:t>
-            </a:r>
+            <a:endParaRPr lang="en-MY"/>
           </a:p>
         </p:txBody>
       </p:sp>
       <p:sp>
         <p:nvSpPr>
-          <p:cNvPr id="4" name="object 35">
+          <p:cNvPr id="4" name="Content Placeholder 3">
             <a:extLst>
               <a:ext uri="{FF2B5EF4-FFF2-40B4-BE49-F238E27FC236}">
-                <a16:creationId xmlns:a16="http://schemas.microsoft.com/office/drawing/2014/main" id="{1AC4EA62-DB1C-4D76-1A04-EA477FE2ADCE}"/>
+                <a16:creationId xmlns:a16="http://schemas.microsoft.com/office/drawing/2014/main" id="{84ACA01B-1A24-FEBA-4937-1DC2AA16C282}"/>
               </a:ext>
             </a:extLst>
           </p:cNvPr>
-          <p:cNvSpPr txBox="1">
-            <a:spLocks/>
+          <p:cNvSpPr>
+            <a:spLocks noGrp="1"/>
           </p:cNvSpPr>
-          <p:nvPr/>
+          <p:nvPr>
+            <p:ph sz="quarter" idx="11"/>
+          </p:nvPr>
         </p:nvSpPr>
-        <p:spPr>
-          <a:xfrm>
-            <a:off x="2213492" y="361714"/>
-            <a:ext cx="16755826" cy="506549"/>
-          </a:xfrm>
-          <a:prstGeom prst="rect">
-            <a:avLst/>
-          </a:prstGeom>
-        </p:spPr>
+        <p:spPr/>
         <p:txBody>
-          <a:bodyPr vert="horz" wrap="square" lIns="0" tIns="13970" rIns="0" bIns="0" rtlCol="0">
-            <a:spAutoFit/>
-          </a:bodyPr>
-          <a:lstStyle>
-            <a:lvl1pPr>
-              <a:defRPr sz="5350" b="0" i="0">
-                <a:solidFill>
-                  <a:srgbClr val="1300E2"/>
-                </a:solidFill>
-                <a:latin typeface="Arial Black"/>
-                <a:ea typeface="+mj-ea"/>
-                <a:cs typeface="Arial Black"/>
-              </a:defRPr>
-            </a:lvl1pPr>
-          </a:lstStyle>
+          <a:bodyPr/>
+          <a:lstStyle/>
           <a:p>
-            <a:pPr marL="12700">
-              <a:spcBef>
-                <a:spcPts val="110"/>
-              </a:spcBef>
-            </a:pPr>
-            <a:r>
-              <a:rPr lang="en-MY" sz="3200" dirty="0"/>
-              <a:t>Title Placeholder</a:t>
-            </a:r>
-            <a:endParaRPr lang="en-MY" sz="3200" b="1" spc="90" dirty="0">
-              <a:latin typeface="Arial Black" panose="020B0604020202020204" pitchFamily="34" charset="0"/>
-              <a:cs typeface="Arial Black" panose="020B0604020202020204" pitchFamily="34" charset="0"/>
-            </a:endParaRPr>
+            <a:endParaRPr lang="en-MY"/>
           </a:p>
         </p:txBody>
       </p:sp>
     </p:spTree>
     <p:extLst>
       <p:ext uri="{BB962C8B-B14F-4D97-AF65-F5344CB8AC3E}">
-        <p14:creationId xmlns:p14="http://schemas.microsoft.com/office/powerpoint/2010/main" val="1389260113"/>
+        <p14:creationId xmlns:p14="http://schemas.microsoft.com/office/powerpoint/2010/main" val="3936232852"/>
       </p:ext>
     </p:extLst>
   </p:cSld>
@@ -7387,6 +7048,36 @@
 </file>
 
 <file path=customXml/item1.xml><?xml version="1.0" encoding="utf-8"?>
+<p:properties xmlns:p="http://schemas.microsoft.com/office/2006/metadata/properties" xmlns:xsi="http://www.w3.org/2001/XMLSchema-instance" xmlns:pc="http://schemas.microsoft.com/office/infopath/2007/PartnerControls">
+  <documentManagement>
+    <_x0031_0_x002e_ChapGohMei xmlns="35e651f9-793f-4312-ae92-7f999fad73ab" xsi:nil="true"/>
+    <Number xmlns="35e651f9-793f-4312-ae92-7f999fad73ab" xsi:nil="true"/>
+    <TaxCatchAll xmlns="22150af8-2c9a-450b-b521-a068fc3c92bd" xsi:nil="true"/>
+    <lcf76f155ced4ddcb4097134ff3c332f xmlns="35e651f9-793f-4312-ae92-7f999fad73ab">
+      <Terms xmlns="http://schemas.microsoft.com/office/infopath/2007/PartnerControls"/>
+    </lcf76f155ced4ddcb4097134ff3c332f>
+    <SharedWithUsers xmlns="22150af8-2c9a-450b-b521-a068fc3c92bd">
+      <UserInfo>
+        <DisplayName/>
+        <AccountId xsi:nil="true"/>
+        <AccountType/>
+      </UserInfo>
+    </SharedWithUsers>
+    <MediaLengthInSeconds xmlns="35e651f9-793f-4312-ae92-7f999fad73ab" xsi:nil="true"/>
+  </documentManagement>
+</p:properties>
+</file>
+
+<file path=customXml/item2.xml><?xml version="1.0" encoding="utf-8"?>
+<?mso-contentType ?>
+<FormTemplates xmlns="http://schemas.microsoft.com/sharepoint/v3/contenttype/forms">
+  <Display>DocumentLibraryForm</Display>
+  <Edit>DocumentLibraryForm</Edit>
+  <New>DocumentLibraryForm</New>
+</FormTemplates>
+</file>
+
+<file path=customXml/item3.xml><?xml version="1.0" encoding="utf-8"?>
 <ct:contentTypeSchema xmlns:ct="http://schemas.microsoft.com/office/2006/metadata/contentType" xmlns:ma="http://schemas.microsoft.com/office/2006/metadata/properties/metaAttributes" ct:_="" ma:_="" ma:contentTypeName="Document" ma:contentTypeID="0x01010063251A0DD0A77B4FA4B382702A42E782" ma:contentTypeVersion="20" ma:contentTypeDescription="Create a new document." ma:contentTypeScope="" ma:versionID="826a6b8a16673c7e2d43e661c3c2c4de">
   <xsd:schema xmlns:xsd="http://www.w3.org/2001/XMLSchema" xmlns:xs="http://www.w3.org/2001/XMLSchema" xmlns:p="http://schemas.microsoft.com/office/2006/metadata/properties" xmlns:ns2="22150af8-2c9a-450b-b521-a068fc3c92bd" xmlns:ns3="35e651f9-793f-4312-ae92-7f999fad73ab" targetNamespace="http://schemas.microsoft.com/office/2006/metadata/properties" ma:root="true" ma:fieldsID="be0a201336443f390dd15968bc518ad7" ns2:_="" ns3:_="">
     <xsd:import namespace="22150af8-2c9a-450b-b521-a068fc3c92bd"/>
@@ -7649,37 +7340,32 @@
 </ct:contentTypeSchema>
 </file>
 
-<file path=customXml/item2.xml><?xml version="1.0" encoding="utf-8"?>
-<?mso-contentType ?>
-<FormTemplates xmlns="http://schemas.microsoft.com/sharepoint/v3/contenttype/forms">
-  <Display>DocumentLibraryForm</Display>
-  <Edit>DocumentLibraryForm</Edit>
-  <New>DocumentLibraryForm</New>
-</FormTemplates>
+<file path=customXml/itemProps1.xml><?xml version="1.0" encoding="utf-8"?>
+<ds:datastoreItem xmlns:ds="http://schemas.openxmlformats.org/officeDocument/2006/customXml" ds:itemID="{1FBFD6F2-3D17-43CC-9112-DD78A27F3E92}">
+  <ds:schemaRefs>
+    <ds:schemaRef ds:uri="http://www.w3.org/XML/1998/namespace"/>
+    <ds:schemaRef ds:uri="http://purl.org/dc/terms/"/>
+    <ds:schemaRef ds:uri="35e651f9-793f-4312-ae92-7f999fad73ab"/>
+    <ds:schemaRef ds:uri="http://purl.org/dc/dcmitype/"/>
+    <ds:schemaRef ds:uri="http://schemas.microsoft.com/office/infopath/2007/PartnerControls"/>
+    <ds:schemaRef ds:uri="http://schemas.microsoft.com/office/2006/documentManagement/types"/>
+    <ds:schemaRef ds:uri="http://schemas.openxmlformats.org/package/2006/metadata/core-properties"/>
+    <ds:schemaRef ds:uri="22150af8-2c9a-450b-b521-a068fc3c92bd"/>
+    <ds:schemaRef ds:uri="http://schemas.microsoft.com/office/2006/metadata/properties"/>
+    <ds:schemaRef ds:uri="http://purl.org/dc/elements/1.1/"/>
+  </ds:schemaRefs>
+</ds:datastoreItem>
 </file>
 
-<file path=customXml/item3.xml><?xml version="1.0" encoding="utf-8"?>
-<p:properties xmlns:p="http://schemas.microsoft.com/office/2006/metadata/properties" xmlns:xsi="http://www.w3.org/2001/XMLSchema-instance" xmlns:pc="http://schemas.microsoft.com/office/infopath/2007/PartnerControls">
-  <documentManagement>
-    <_x0031_0_x002e_ChapGohMei xmlns="35e651f9-793f-4312-ae92-7f999fad73ab" xsi:nil="true"/>
-    <Number xmlns="35e651f9-793f-4312-ae92-7f999fad73ab" xsi:nil="true"/>
-    <TaxCatchAll xmlns="22150af8-2c9a-450b-b521-a068fc3c92bd" xsi:nil="true"/>
-    <lcf76f155ced4ddcb4097134ff3c332f xmlns="35e651f9-793f-4312-ae92-7f999fad73ab">
-      <Terms xmlns="http://schemas.microsoft.com/office/infopath/2007/PartnerControls"/>
-    </lcf76f155ced4ddcb4097134ff3c332f>
-    <SharedWithUsers xmlns="22150af8-2c9a-450b-b521-a068fc3c92bd">
-      <UserInfo>
-        <DisplayName/>
-        <AccountId xsi:nil="true"/>
-        <AccountType/>
-      </UserInfo>
-    </SharedWithUsers>
-    <MediaLengthInSeconds xmlns="35e651f9-793f-4312-ae92-7f999fad73ab" xsi:nil="true"/>
-  </documentManagement>
-</p:properties>
+<file path=customXml/itemProps2.xml><?xml version="1.0" encoding="utf-8"?>
+<ds:datastoreItem xmlns:ds="http://schemas.openxmlformats.org/officeDocument/2006/customXml" ds:itemID="{0766029B-5488-44E8-82E9-63D46611247A}">
+  <ds:schemaRefs>
+    <ds:schemaRef ds:uri="http://schemas.microsoft.com/sharepoint/v3/contenttype/forms"/>
+  </ds:schemaRefs>
+</ds:datastoreItem>
 </file>
 
-<file path=customXml/itemProps1.xml><?xml version="1.0" encoding="utf-8"?>
+<file path=customXml/itemProps3.xml><?xml version="1.0" encoding="utf-8"?>
 <ds:datastoreItem xmlns:ds="http://schemas.openxmlformats.org/officeDocument/2006/customXml" ds:itemID="{6AA4BC76-E1EF-4E16-A7A9-437744E8D4BD}">
   <ds:schemaRefs>
     <ds:schemaRef ds:uri="http://schemas.microsoft.com/office/2006/metadata/contentType"/>
@@ -7696,29 +7382,4 @@
     <ds:schemaRef ds:uri="http://schemas.microsoft.com/internal/obd"/>
   </ds:schemaRefs>
 </ds:datastoreItem>
-</file>
-
-<file path=customXml/itemProps2.xml><?xml version="1.0" encoding="utf-8"?>
-<ds:datastoreItem xmlns:ds="http://schemas.openxmlformats.org/officeDocument/2006/customXml" ds:itemID="{0766029B-5488-44E8-82E9-63D46611247A}">
-  <ds:schemaRefs>
-    <ds:schemaRef ds:uri="http://schemas.microsoft.com/sharepoint/v3/contenttype/forms"/>
-  </ds:schemaRefs>
-</ds:datastoreItem>
-</file>
-
-<file path=customXml/itemProps3.xml><?xml version="1.0" encoding="utf-8"?>
-<ds:datastoreItem xmlns:ds="http://schemas.openxmlformats.org/officeDocument/2006/customXml" ds:itemID="{1FBFD6F2-3D17-43CC-9112-DD78A27F3E92}">
-  <ds:schemaRefs>
-    <ds:schemaRef ds:uri="http://www.w3.org/XML/1998/namespace"/>
-    <ds:schemaRef ds:uri="http://purl.org/dc/terms/"/>
-    <ds:schemaRef ds:uri="35e651f9-793f-4312-ae92-7f999fad73ab"/>
-    <ds:schemaRef ds:uri="http://purl.org/dc/dcmitype/"/>
-    <ds:schemaRef ds:uri="http://schemas.microsoft.com/office/infopath/2007/PartnerControls"/>
-    <ds:schemaRef ds:uri="http://schemas.microsoft.com/office/2006/documentManagement/types"/>
-    <ds:schemaRef ds:uri="http://schemas.openxmlformats.org/package/2006/metadata/core-properties"/>
-    <ds:schemaRef ds:uri="22150af8-2c9a-450b-b521-a068fc3c92bd"/>
-    <ds:schemaRef ds:uri="http://schemas.microsoft.com/office/2006/metadata/properties"/>
-    <ds:schemaRef ds:uri="http://purl.org/dc/elements/1.1/"/>
-  </ds:schemaRefs>
-</ds:datastoreItem>
 </file>
--- a/template_exec_deck.pptx
+++ b/template_exec_deck.pptx
@@ -8,7 +8,7 @@
     <p:notesMasterId r:id="rId12"/>
   </p:notesMasterIdLst>
   <p:sldIdLst>
-    <p:sldId id="340" r:id="rId5"/>
+    <p:sldId id="354" r:id="rId5"/>
     <p:sldId id="347" r:id="rId6"/>
     <p:sldId id="348" r:id="rId7"/>
     <p:sldId id="349" r:id="rId8"/>
@@ -429,90 +429,6 @@
 </p:notesMaster>
 </file>
 
-<file path=ppt/notesSlides/notesSlide1.xml><?xml version="1.0" encoding="utf-8"?>
-<p:notes xmlns:a="http://schemas.openxmlformats.org/drawingml/2006/main" xmlns:r="http://schemas.openxmlformats.org/officeDocument/2006/relationships" xmlns:p="http://schemas.openxmlformats.org/presentationml/2006/main">
-  <p:cSld>
-    <p:spTree>
-      <p:nvGrpSpPr>
-        <p:cNvPr id="1" name=""/>
-        <p:cNvGrpSpPr/>
-        <p:nvPr/>
-      </p:nvGrpSpPr>
-      <p:grpSpPr>
-        <a:xfrm>
-          <a:off x="0" y="0"/>
-          <a:ext cx="0" cy="0"/>
-          <a:chOff x="0" y="0"/>
-          <a:chExt cx="0" cy="0"/>
-        </a:xfrm>
-      </p:grpSpPr>
-      <p:sp>
-        <p:nvSpPr>
-          <p:cNvPr id="2" name="Slide Image Placeholder 1"/>
-          <p:cNvSpPr>
-            <a:spLocks noGrp="1" noRot="1" noChangeAspect="1"/>
-          </p:cNvSpPr>
-          <p:nvPr>
-            <p:ph type="sldImg"/>
-          </p:nvPr>
-        </p:nvSpPr>
-        <p:spPr/>
-      </p:sp>
-      <p:sp>
-        <p:nvSpPr>
-          <p:cNvPr id="3" name="Notes Placeholder 2"/>
-          <p:cNvSpPr>
-            <a:spLocks noGrp="1"/>
-          </p:cNvSpPr>
-          <p:nvPr>
-            <p:ph type="body" idx="1"/>
-          </p:nvPr>
-        </p:nvSpPr>
-        <p:spPr/>
-        <p:txBody>
-          <a:bodyPr/>
-          <a:lstStyle/>
-          <a:p>
-            <a:endParaRPr lang="en-US" dirty="0"/>
-          </a:p>
-        </p:txBody>
-      </p:sp>
-      <p:sp>
-        <p:nvSpPr>
-          <p:cNvPr id="4" name="Slide Number Placeholder 3"/>
-          <p:cNvSpPr>
-            <a:spLocks noGrp="1"/>
-          </p:cNvSpPr>
-          <p:nvPr>
-            <p:ph type="sldNum" sz="quarter" idx="5"/>
-          </p:nvPr>
-        </p:nvSpPr>
-        <p:spPr/>
-        <p:txBody>
-          <a:bodyPr/>
-          <a:lstStyle/>
-          <a:p>
-            <a:fld id="{914D2C53-3FDF-5C4D-9CE3-B919A6451597}" type="slidenum">
-              <a:rPr lang="en-US" smtClean="0"/>
-              <a:t>0</a:t>
-            </a:fld>
-            <a:endParaRPr lang="en-US"/>
-          </a:p>
-        </p:txBody>
-      </p:sp>
-    </p:spTree>
-    <p:extLst>
-      <p:ext uri="{BB962C8B-B14F-4D97-AF65-F5344CB8AC3E}">
-        <p14:creationId xmlns:p14="http://schemas.microsoft.com/office/powerpoint/2010/main" val="1368257035"/>
-      </p:ext>
-    </p:extLst>
-  </p:cSld>
-  <p:clrMapOvr>
-    <a:masterClrMapping/>
-  </p:clrMapOvr>
-</p:notes>
-</file>
-
 <file path=ppt/slideLayouts/slideLayout1.xml><?xml version="1.0" encoding="utf-8"?>
 <p:sldLayout xmlns:a="http://schemas.openxmlformats.org/drawingml/2006/main" xmlns:r="http://schemas.openxmlformats.org/officeDocument/2006/relationships" xmlns:p="http://schemas.openxmlformats.org/presentationml/2006/main" preserve="1" userDrawn="1">
   <p:cSld name="Title Slide">
@@ -566,6 +482,96 @@
           </a:prstGeom>
         </p:spPr>
       </p:pic>
+      <p:sp>
+        <p:nvSpPr>
+          <p:cNvPr id="2" name="Content Placeholder 2">
+            <a:extLst>
+              <a:ext uri="{FF2B5EF4-FFF2-40B4-BE49-F238E27FC236}">
+                <a16:creationId xmlns:a16="http://schemas.microsoft.com/office/drawing/2014/main" id="{34C5FBF2-551F-BA33-79B5-AF158EEC36BE}"/>
+              </a:ext>
+            </a:extLst>
+          </p:cNvPr>
+          <p:cNvSpPr>
+            <a:spLocks noGrp="1"/>
+          </p:cNvSpPr>
+          <p:nvPr>
+            <p:ph sz="quarter" idx="10" hasCustomPrompt="1"/>
+          </p:nvPr>
+        </p:nvSpPr>
+        <p:spPr>
+          <a:xfrm>
+            <a:off x="11223148" y="3389595"/>
+            <a:ext cx="6932632" cy="677108"/>
+          </a:xfrm>
+        </p:spPr>
+        <p:txBody>
+          <a:bodyPr/>
+          <a:lstStyle>
+            <a:lvl1pPr>
+              <a:defRPr lang="en-US" sz="4400" b="1" spc="-10" dirty="0" smtClean="0">
+                <a:solidFill>
+                  <a:srgbClr val="1500D9"/>
+                </a:solidFill>
+                <a:latin typeface="Arial Black" panose="020B0604020202020204" pitchFamily="34" charset="0"/>
+                <a:ea typeface="+mj-ea"/>
+                <a:cs typeface="+mj-cs"/>
+              </a:defRPr>
+            </a:lvl1pPr>
+          </a:lstStyle>
+          <a:p>
+            <a:pPr lvl="0"/>
+            <a:r>
+              <a:rPr lang="en-US" dirty="0"/>
+              <a:t>Title placeholder</a:t>
+            </a:r>
+          </a:p>
+        </p:txBody>
+      </p:sp>
+      <p:sp>
+        <p:nvSpPr>
+          <p:cNvPr id="3" name="Content Placeholder 4">
+            <a:extLst>
+              <a:ext uri="{FF2B5EF4-FFF2-40B4-BE49-F238E27FC236}">
+                <a16:creationId xmlns:a16="http://schemas.microsoft.com/office/drawing/2014/main" id="{D8CF3CD4-D10E-D575-D22F-221453646224}"/>
+              </a:ext>
+            </a:extLst>
+          </p:cNvPr>
+          <p:cNvSpPr>
+            <a:spLocks noGrp="1"/>
+          </p:cNvSpPr>
+          <p:nvPr>
+            <p:ph sz="quarter" idx="11" hasCustomPrompt="1"/>
+          </p:nvPr>
+        </p:nvSpPr>
+        <p:spPr>
+          <a:xfrm>
+            <a:off x="11223148" y="4698184"/>
+            <a:ext cx="6205720" cy="430887"/>
+          </a:xfrm>
+        </p:spPr>
+        <p:txBody>
+          <a:bodyPr/>
+          <a:lstStyle>
+            <a:lvl1pPr>
+              <a:defRPr lang="en-MY" sz="2800" dirty="0">
+                <a:solidFill>
+                  <a:srgbClr val="FF7900"/>
+                </a:solidFill>
+                <a:latin typeface="Arial"/>
+                <a:cs typeface="Arial"/>
+              </a:defRPr>
+            </a:lvl1pPr>
+          </a:lstStyle>
+          <a:p>
+            <a:pPr lvl="0"/>
+            <a:r>
+              <a:rPr lang="en-US" dirty="0"/>
+              <a:t>Subtitle placeholder</a:t>
+            </a:r>
+            <a:endParaRPr lang="en-MY" dirty="0"/>
+          </a:p>
+        </p:txBody>
+      </p:sp>
     </p:spTree>
   </p:cSld>
   <p:clrMapOvr>
@@ -1755,7 +1761,7 @@
             <a:pPr lvl="0"/>
             <a:r>
               <a:rPr lang="en-US" dirty="0"/>
-              <a:t>Title Placeholder</a:t>
+              <a:t>Title placeholder</a:t>
             </a:r>
           </a:p>
         </p:txBody>
@@ -1796,7 +1802,7 @@
             <a:pPr lvl="0"/>
             <a:r>
               <a:rPr lang="en-US" dirty="0"/>
-              <a:t>Body Placeholder</a:t>
+              <a:t>Content placeholder</a:t>
             </a:r>
             <a:endParaRPr lang="en-MY" dirty="0"/>
           </a:p>
@@ -2977,540 +2983,6 @@
           </p:spPr>
         </p:pic>
       </p:grpSp>
-      <p:grpSp>
-        <p:nvGrpSpPr>
-          <p:cNvPr id="29" name="Group 28">
-            <a:extLst>
-              <a:ext uri="{FF2B5EF4-FFF2-40B4-BE49-F238E27FC236}">
-                <a16:creationId xmlns:a16="http://schemas.microsoft.com/office/drawing/2014/main" id="{0350912E-9F4A-AB9D-8887-3F0CFCAC31BC}"/>
-              </a:ext>
-            </a:extLst>
-          </p:cNvPr>
-          <p:cNvGrpSpPr/>
-          <p:nvPr userDrawn="1"/>
-        </p:nvGrpSpPr>
-        <p:grpSpPr>
-          <a:xfrm>
-            <a:off x="0" y="2970506"/>
-            <a:ext cx="7310961" cy="1672154"/>
-            <a:chOff x="0" y="2970506"/>
-            <a:chExt cx="7310961" cy="1672154"/>
-          </a:xfrm>
-        </p:grpSpPr>
-        <p:sp>
-          <p:nvSpPr>
-            <p:cNvPr id="30" name="object 9">
-              <a:extLst>
-                <a:ext uri="{FF2B5EF4-FFF2-40B4-BE49-F238E27FC236}">
-                  <a16:creationId xmlns:a16="http://schemas.microsoft.com/office/drawing/2014/main" id="{F02F1A0A-1E8D-0E4C-192D-88589E15268D}"/>
-                </a:ext>
-              </a:extLst>
-            </p:cNvPr>
-            <p:cNvSpPr/>
-            <p:nvPr/>
-          </p:nvSpPr>
-          <p:spPr>
-            <a:xfrm>
-              <a:off x="0" y="2970506"/>
-              <a:ext cx="7309484" cy="1671320"/>
-            </a:xfrm>
-            <a:custGeom>
-              <a:avLst/>
-              <a:gdLst/>
-              <a:ahLst/>
-              <a:cxnLst/>
-              <a:rect l="l" t="t" r="r" b="b"/>
-              <a:pathLst>
-                <a:path w="7309484" h="1671320">
-                  <a:moveTo>
-                    <a:pt x="7309054" y="0"/>
-                  </a:moveTo>
-                  <a:lnTo>
-                    <a:pt x="0" y="0"/>
-                  </a:lnTo>
-                  <a:lnTo>
-                    <a:pt x="0" y="1671111"/>
-                  </a:lnTo>
-                  <a:lnTo>
-                    <a:pt x="7309054" y="1671111"/>
-                  </a:lnTo>
-                  <a:lnTo>
-                    <a:pt x="7309054" y="0"/>
-                  </a:lnTo>
-                  <a:close/>
-                </a:path>
-              </a:pathLst>
-            </a:custGeom>
-            <a:solidFill>
-              <a:srgbClr val="1300E2"/>
-            </a:solidFill>
-          </p:spPr>
-          <p:txBody>
-            <a:bodyPr wrap="square" lIns="0" tIns="0" rIns="0" bIns="0" rtlCol="0"/>
-            <a:lstStyle/>
-            <a:p>
-              <a:endParaRPr/>
-            </a:p>
-          </p:txBody>
-        </p:sp>
-        <p:grpSp>
-          <p:nvGrpSpPr>
-            <p:cNvPr id="31" name="Group 30">
-              <a:extLst>
-                <a:ext uri="{FF2B5EF4-FFF2-40B4-BE49-F238E27FC236}">
-                  <a16:creationId xmlns:a16="http://schemas.microsoft.com/office/drawing/2014/main" id="{EB9E10F8-BB05-3A6D-6BF0-0090431042B4}"/>
-                </a:ext>
-              </a:extLst>
-            </p:cNvPr>
-            <p:cNvGrpSpPr/>
-            <p:nvPr/>
-          </p:nvGrpSpPr>
-          <p:grpSpPr>
-            <a:xfrm>
-              <a:off x="5639999" y="2971129"/>
-              <a:ext cx="1670962" cy="1671531"/>
-              <a:chOff x="5639999" y="2971129"/>
-              <a:chExt cx="1670962" cy="1671531"/>
-            </a:xfrm>
-          </p:grpSpPr>
-          <p:sp>
-            <p:nvSpPr>
-              <p:cNvPr id="32" name="object 13">
-                <a:extLst>
-                  <a:ext uri="{FF2B5EF4-FFF2-40B4-BE49-F238E27FC236}">
-                    <a16:creationId xmlns:a16="http://schemas.microsoft.com/office/drawing/2014/main" id="{28892DEE-B923-E458-F57A-E9F270CA2E48}"/>
-                  </a:ext>
-                </a:extLst>
-              </p:cNvPr>
-              <p:cNvSpPr/>
-              <p:nvPr/>
-            </p:nvSpPr>
-            <p:spPr>
-              <a:xfrm>
-                <a:off x="6476571" y="3807701"/>
-                <a:ext cx="834390" cy="834390"/>
-              </a:xfrm>
-              <a:custGeom>
-                <a:avLst/>
-                <a:gdLst/>
-                <a:ahLst/>
-                <a:cxnLst/>
-                <a:rect l="l" t="t" r="r" b="b"/>
-                <a:pathLst>
-                  <a:path w="834390" h="834389">
-                    <a:moveTo>
-                      <a:pt x="833848" y="0"/>
-                    </a:moveTo>
-                    <a:lnTo>
-                      <a:pt x="0" y="833848"/>
-                    </a:lnTo>
-                    <a:lnTo>
-                      <a:pt x="833848" y="833848"/>
-                    </a:lnTo>
-                    <a:lnTo>
-                      <a:pt x="833848" y="0"/>
-                    </a:lnTo>
-                    <a:close/>
-                  </a:path>
-                </a:pathLst>
-              </a:custGeom>
-              <a:solidFill>
-                <a:srgbClr val="1300E2"/>
-              </a:solidFill>
-            </p:spPr>
-            <p:txBody>
-              <a:bodyPr wrap="square" lIns="0" tIns="0" rIns="0" bIns="0" rtlCol="0"/>
-              <a:lstStyle/>
-              <a:p>
-                <a:endParaRPr/>
-              </a:p>
-            </p:txBody>
-          </p:sp>
-          <p:sp>
-            <p:nvSpPr>
-              <p:cNvPr id="33" name="object 14">
-                <a:extLst>
-                  <a:ext uri="{FF2B5EF4-FFF2-40B4-BE49-F238E27FC236}">
-                    <a16:creationId xmlns:a16="http://schemas.microsoft.com/office/drawing/2014/main" id="{F59082EE-D6FE-AD27-A5C1-4991B337E583}"/>
-                  </a:ext>
-                </a:extLst>
-              </p:cNvPr>
-              <p:cNvSpPr/>
-              <p:nvPr/>
-            </p:nvSpPr>
-            <p:spPr>
-              <a:xfrm>
-                <a:off x="5639999" y="2971129"/>
-                <a:ext cx="1670685" cy="1670685"/>
-              </a:xfrm>
-              <a:custGeom>
-                <a:avLst/>
-                <a:gdLst/>
-                <a:ahLst/>
-                <a:cxnLst/>
-                <a:rect l="l" t="t" r="r" b="b"/>
-                <a:pathLst>
-                  <a:path w="1670684" h="1670685">
-                    <a:moveTo>
-                      <a:pt x="1670420" y="0"/>
-                    </a:moveTo>
-                    <a:lnTo>
-                      <a:pt x="0" y="1670420"/>
-                    </a:lnTo>
-                    <a:lnTo>
-                      <a:pt x="836571" y="1670420"/>
-                    </a:lnTo>
-                    <a:lnTo>
-                      <a:pt x="1670420" y="836571"/>
-                    </a:lnTo>
-                    <a:lnTo>
-                      <a:pt x="1670420" y="0"/>
-                    </a:lnTo>
-                    <a:close/>
-                  </a:path>
-                </a:pathLst>
-              </a:custGeom>
-              <a:solidFill>
-                <a:srgbClr val="160094"/>
-              </a:solidFill>
-            </p:spPr>
-            <p:txBody>
-              <a:bodyPr wrap="square" lIns="0" tIns="0" rIns="0" bIns="0" rtlCol="0"/>
-              <a:lstStyle/>
-              <a:p>
-                <a:endParaRPr/>
-              </a:p>
-            </p:txBody>
-          </p:sp>
-          <p:sp>
-            <p:nvSpPr>
-              <p:cNvPr id="34" name="object 15">
-                <a:extLst>
-                  <a:ext uri="{FF2B5EF4-FFF2-40B4-BE49-F238E27FC236}">
-                    <a16:creationId xmlns:a16="http://schemas.microsoft.com/office/drawing/2014/main" id="{628AD793-C79E-814B-FAC5-7E3461466DD9}"/>
-                  </a:ext>
-                </a:extLst>
-              </p:cNvPr>
-              <p:cNvSpPr/>
-              <p:nvPr/>
-            </p:nvSpPr>
-            <p:spPr>
-              <a:xfrm>
-                <a:off x="5639999" y="2971135"/>
-                <a:ext cx="1670685" cy="1670685"/>
-              </a:xfrm>
-              <a:custGeom>
-                <a:avLst/>
-                <a:gdLst/>
-                <a:ahLst/>
-                <a:cxnLst/>
-                <a:rect l="l" t="t" r="r" b="b"/>
-                <a:pathLst>
-                  <a:path w="1670684" h="1670685">
-                    <a:moveTo>
-                      <a:pt x="1670420" y="0"/>
-                    </a:moveTo>
-                    <a:lnTo>
-                      <a:pt x="836571" y="0"/>
-                    </a:lnTo>
-                    <a:lnTo>
-                      <a:pt x="0" y="836571"/>
-                    </a:lnTo>
-                    <a:lnTo>
-                      <a:pt x="10" y="1670409"/>
-                    </a:lnTo>
-                    <a:lnTo>
-                      <a:pt x="1670420" y="0"/>
-                    </a:lnTo>
-                    <a:close/>
-                  </a:path>
-                </a:pathLst>
-              </a:custGeom>
-              <a:solidFill>
-                <a:srgbClr val="1300E2"/>
-              </a:solidFill>
-            </p:spPr>
-            <p:txBody>
-              <a:bodyPr wrap="square" lIns="0" tIns="0" rIns="0" bIns="0" rtlCol="0"/>
-              <a:lstStyle/>
-              <a:p>
-                <a:endParaRPr/>
-              </a:p>
-            </p:txBody>
-          </p:sp>
-          <p:sp>
-            <p:nvSpPr>
-              <p:cNvPr id="35" name="object 16">
-                <a:extLst>
-                  <a:ext uri="{FF2B5EF4-FFF2-40B4-BE49-F238E27FC236}">
-                    <a16:creationId xmlns:a16="http://schemas.microsoft.com/office/drawing/2014/main" id="{9F83029B-9CE3-C799-7B8E-E4CE7986294A}"/>
-                  </a:ext>
-                </a:extLst>
-              </p:cNvPr>
-              <p:cNvSpPr/>
-              <p:nvPr/>
-            </p:nvSpPr>
-            <p:spPr>
-              <a:xfrm>
-                <a:off x="5640004" y="2971130"/>
-                <a:ext cx="836930" cy="836930"/>
-              </a:xfrm>
-              <a:custGeom>
-                <a:avLst/>
-                <a:gdLst/>
-                <a:ahLst/>
-                <a:cxnLst/>
-                <a:rect l="l" t="t" r="r" b="b"/>
-                <a:pathLst>
-                  <a:path w="836929" h="836929">
-                    <a:moveTo>
-                      <a:pt x="836571" y="0"/>
-                    </a:moveTo>
-                    <a:lnTo>
-                      <a:pt x="0" y="0"/>
-                    </a:lnTo>
-                    <a:lnTo>
-                      <a:pt x="0" y="836571"/>
-                    </a:lnTo>
-                    <a:lnTo>
-                      <a:pt x="836571" y="0"/>
-                    </a:lnTo>
-                    <a:close/>
-                  </a:path>
-                </a:pathLst>
-              </a:custGeom>
-              <a:solidFill>
-                <a:srgbClr val="160094"/>
-              </a:solidFill>
-            </p:spPr>
-            <p:txBody>
-              <a:bodyPr wrap="square" lIns="0" tIns="0" rIns="0" bIns="0" rtlCol="0"/>
-              <a:lstStyle/>
-              <a:p>
-                <a:endParaRPr/>
-              </a:p>
-            </p:txBody>
-          </p:sp>
-          <p:sp>
-            <p:nvSpPr>
-              <p:cNvPr id="36" name="object 17">
-                <a:extLst>
-                  <a:ext uri="{FF2B5EF4-FFF2-40B4-BE49-F238E27FC236}">
-                    <a16:creationId xmlns:a16="http://schemas.microsoft.com/office/drawing/2014/main" id="{8BBBF666-1A15-FB80-3BB5-16591F7E0725}"/>
-                  </a:ext>
-                </a:extLst>
-              </p:cNvPr>
-              <p:cNvSpPr/>
-              <p:nvPr/>
-            </p:nvSpPr>
-            <p:spPr>
-              <a:xfrm>
-                <a:off x="6893469" y="4225305"/>
-                <a:ext cx="417195" cy="417195"/>
-              </a:xfrm>
-              <a:custGeom>
-                <a:avLst/>
-                <a:gdLst/>
-                <a:ahLst/>
-                <a:cxnLst/>
-                <a:rect l="l" t="t" r="r" b="b"/>
-                <a:pathLst>
-                  <a:path w="417195" h="417195">
-                    <a:moveTo>
-                      <a:pt x="416950" y="0"/>
-                    </a:moveTo>
-                    <a:lnTo>
-                      <a:pt x="0" y="416950"/>
-                    </a:lnTo>
-                    <a:lnTo>
-                      <a:pt x="416950" y="416950"/>
-                    </a:lnTo>
-                    <a:lnTo>
-                      <a:pt x="416950" y="0"/>
-                    </a:lnTo>
-                    <a:close/>
-                  </a:path>
-                </a:pathLst>
-              </a:custGeom>
-              <a:solidFill>
-                <a:srgbClr val="1300E2"/>
-              </a:solidFill>
-            </p:spPr>
-            <p:txBody>
-              <a:bodyPr wrap="square" lIns="0" tIns="0" rIns="0" bIns="0" rtlCol="0"/>
-              <a:lstStyle/>
-              <a:p>
-                <a:endParaRPr/>
-              </a:p>
-            </p:txBody>
-          </p:sp>
-          <p:sp>
-            <p:nvSpPr>
-              <p:cNvPr id="37" name="object 18">
-                <a:extLst>
-                  <a:ext uri="{FF2B5EF4-FFF2-40B4-BE49-F238E27FC236}">
-                    <a16:creationId xmlns:a16="http://schemas.microsoft.com/office/drawing/2014/main" id="{FA895B7B-A11A-9EB7-CBA9-615AFE8B0033}"/>
-                  </a:ext>
-                </a:extLst>
-              </p:cNvPr>
-              <p:cNvSpPr/>
-              <p:nvPr/>
-            </p:nvSpPr>
-            <p:spPr>
-              <a:xfrm>
-                <a:off x="6475173" y="3806998"/>
-                <a:ext cx="835660" cy="835660"/>
-              </a:xfrm>
-              <a:custGeom>
-                <a:avLst/>
-                <a:gdLst/>
-                <a:ahLst/>
-                <a:cxnLst/>
-                <a:rect l="l" t="t" r="r" b="b"/>
-                <a:pathLst>
-                  <a:path w="835659" h="835660">
-                    <a:moveTo>
-                      <a:pt x="835252" y="0"/>
-                    </a:moveTo>
-                    <a:lnTo>
-                      <a:pt x="0" y="835252"/>
-                    </a:lnTo>
-                    <a:lnTo>
-                      <a:pt x="418301" y="835252"/>
-                    </a:lnTo>
-                    <a:lnTo>
-                      <a:pt x="835252" y="418301"/>
-                    </a:lnTo>
-                    <a:lnTo>
-                      <a:pt x="835252" y="0"/>
-                    </a:lnTo>
-                    <a:close/>
-                  </a:path>
-                </a:pathLst>
-              </a:custGeom>
-              <a:solidFill>
-                <a:srgbClr val="FF5D00"/>
-              </a:solidFill>
-            </p:spPr>
-            <p:txBody>
-              <a:bodyPr wrap="square" lIns="0" tIns="0" rIns="0" bIns="0" rtlCol="0"/>
-              <a:lstStyle/>
-              <a:p>
-                <a:endParaRPr/>
-              </a:p>
-            </p:txBody>
-          </p:sp>
-          <p:sp>
-            <p:nvSpPr>
-              <p:cNvPr id="38" name="object 19">
-                <a:extLst>
-                  <a:ext uri="{FF2B5EF4-FFF2-40B4-BE49-F238E27FC236}">
-                    <a16:creationId xmlns:a16="http://schemas.microsoft.com/office/drawing/2014/main" id="{43859944-191E-08D8-54B8-540033B92D01}"/>
-                  </a:ext>
-                </a:extLst>
-              </p:cNvPr>
-              <p:cNvSpPr/>
-              <p:nvPr/>
-            </p:nvSpPr>
-            <p:spPr>
-              <a:xfrm>
-                <a:off x="6475172" y="3807000"/>
-                <a:ext cx="835660" cy="835660"/>
-              </a:xfrm>
-              <a:custGeom>
-                <a:avLst/>
-                <a:gdLst/>
-                <a:ahLst/>
-                <a:cxnLst/>
-                <a:rect l="l" t="t" r="r" b="b"/>
-                <a:pathLst>
-                  <a:path w="835659" h="835660">
-                    <a:moveTo>
-                      <a:pt x="835252" y="0"/>
-                    </a:moveTo>
-                    <a:lnTo>
-                      <a:pt x="418301" y="0"/>
-                    </a:lnTo>
-                    <a:lnTo>
-                      <a:pt x="0" y="418301"/>
-                    </a:lnTo>
-                    <a:lnTo>
-                      <a:pt x="0" y="835252"/>
-                    </a:lnTo>
-                    <a:lnTo>
-                      <a:pt x="835252" y="0"/>
-                    </a:lnTo>
-                    <a:close/>
-                  </a:path>
-                </a:pathLst>
-              </a:custGeom>
-              <a:solidFill>
-                <a:srgbClr val="160094"/>
-              </a:solidFill>
-            </p:spPr>
-            <p:txBody>
-              <a:bodyPr wrap="square" lIns="0" tIns="0" rIns="0" bIns="0" rtlCol="0"/>
-              <a:lstStyle/>
-              <a:p>
-                <a:endParaRPr/>
-              </a:p>
-            </p:txBody>
-          </p:sp>
-          <p:sp>
-            <p:nvSpPr>
-              <p:cNvPr id="39" name="object 20">
-                <a:extLst>
-                  <a:ext uri="{FF2B5EF4-FFF2-40B4-BE49-F238E27FC236}">
-                    <a16:creationId xmlns:a16="http://schemas.microsoft.com/office/drawing/2014/main" id="{6BBD6264-9A36-7CAA-6168-3EFB92BCBAFC}"/>
-                  </a:ext>
-                </a:extLst>
-              </p:cNvPr>
-              <p:cNvSpPr/>
-              <p:nvPr/>
-            </p:nvSpPr>
-            <p:spPr>
-              <a:xfrm>
-                <a:off x="6475169" y="3807004"/>
-                <a:ext cx="418465" cy="418465"/>
-              </a:xfrm>
-              <a:custGeom>
-                <a:avLst/>
-                <a:gdLst/>
-                <a:ahLst/>
-                <a:cxnLst/>
-                <a:rect l="l" t="t" r="r" b="b"/>
-                <a:pathLst>
-                  <a:path w="418465" h="418464">
-                    <a:moveTo>
-                      <a:pt x="418301" y="0"/>
-                    </a:moveTo>
-                    <a:lnTo>
-                      <a:pt x="0" y="0"/>
-                    </a:lnTo>
-                    <a:lnTo>
-                      <a:pt x="0" y="418301"/>
-                    </a:lnTo>
-                    <a:lnTo>
-                      <a:pt x="418301" y="0"/>
-                    </a:lnTo>
-                    <a:close/>
-                  </a:path>
-                </a:pathLst>
-              </a:custGeom>
-              <a:solidFill>
-                <a:srgbClr val="FF5D00"/>
-              </a:solidFill>
-            </p:spPr>
-            <p:txBody>
-              <a:bodyPr wrap="square" lIns="0" tIns="0" rIns="0" bIns="0" rtlCol="0"/>
-              <a:lstStyle/>
-              <a:p>
-                <a:endParaRPr/>
-              </a:p>
-            </p:txBody>
-          </p:sp>
-        </p:grpSp>
-      </p:grpSp>
       <p:pic>
         <p:nvPicPr>
           <p:cNvPr id="49" name="Picture 48">
@@ -3546,6 +3018,96 @@
           </a:prstGeom>
         </p:spPr>
       </p:pic>
+      <p:sp>
+        <p:nvSpPr>
+          <p:cNvPr id="3" name="Content Placeholder 2">
+            <a:extLst>
+              <a:ext uri="{FF2B5EF4-FFF2-40B4-BE49-F238E27FC236}">
+                <a16:creationId xmlns:a16="http://schemas.microsoft.com/office/drawing/2014/main" id="{5F263346-B9E3-25CD-2E7D-CE19D43A17F2}"/>
+              </a:ext>
+            </a:extLst>
+          </p:cNvPr>
+          <p:cNvSpPr>
+            <a:spLocks noGrp="1"/>
+          </p:cNvSpPr>
+          <p:nvPr>
+            <p:ph sz="quarter" idx="10" hasCustomPrompt="1"/>
+          </p:nvPr>
+        </p:nvSpPr>
+        <p:spPr>
+          <a:xfrm>
+            <a:off x="11223148" y="3389595"/>
+            <a:ext cx="6932632" cy="677108"/>
+          </a:xfrm>
+        </p:spPr>
+        <p:txBody>
+          <a:bodyPr/>
+          <a:lstStyle>
+            <a:lvl1pPr>
+              <a:defRPr lang="en-US" sz="4400" b="1" spc="-10" dirty="0" smtClean="0">
+                <a:solidFill>
+                  <a:schemeClr val="bg1"/>
+                </a:solidFill>
+                <a:latin typeface="Arial Black" panose="020B0604020202020204" pitchFamily="34" charset="0"/>
+                <a:ea typeface="+mj-ea"/>
+                <a:cs typeface="+mj-cs"/>
+              </a:defRPr>
+            </a:lvl1pPr>
+          </a:lstStyle>
+          <a:p>
+            <a:pPr lvl="0"/>
+            <a:r>
+              <a:rPr lang="en-US" dirty="0"/>
+              <a:t>Title placeholder</a:t>
+            </a:r>
+          </a:p>
+        </p:txBody>
+      </p:sp>
+      <p:sp>
+        <p:nvSpPr>
+          <p:cNvPr id="5" name="Content Placeholder 4">
+            <a:extLst>
+              <a:ext uri="{FF2B5EF4-FFF2-40B4-BE49-F238E27FC236}">
+                <a16:creationId xmlns:a16="http://schemas.microsoft.com/office/drawing/2014/main" id="{D0598757-34AA-312E-DA8A-0118C1B79002}"/>
+              </a:ext>
+            </a:extLst>
+          </p:cNvPr>
+          <p:cNvSpPr>
+            <a:spLocks noGrp="1"/>
+          </p:cNvSpPr>
+          <p:nvPr>
+            <p:ph sz="quarter" idx="11" hasCustomPrompt="1"/>
+          </p:nvPr>
+        </p:nvSpPr>
+        <p:spPr>
+          <a:xfrm>
+            <a:off x="11223148" y="4698184"/>
+            <a:ext cx="6205720" cy="430887"/>
+          </a:xfrm>
+        </p:spPr>
+        <p:txBody>
+          <a:bodyPr/>
+          <a:lstStyle>
+            <a:lvl1pPr>
+              <a:defRPr lang="en-MY" sz="2800" dirty="0">
+                <a:solidFill>
+                  <a:srgbClr val="FF7900"/>
+                </a:solidFill>
+                <a:latin typeface="Arial"/>
+                <a:cs typeface="Arial"/>
+              </a:defRPr>
+            </a:lvl1pPr>
+          </a:lstStyle>
+          <a:p>
+            <a:pPr lvl="0"/>
+            <a:r>
+              <a:rPr lang="en-US" dirty="0"/>
+              <a:t>Subtitle placeholder</a:t>
+            </a:r>
+            <a:endParaRPr lang="en-MY" dirty="0"/>
+          </a:p>
+        </p:txBody>
+      </p:sp>
     </p:spTree>
     <p:extLst>
       <p:ext uri="{BB962C8B-B14F-4D97-AF65-F5344CB8AC3E}">
@@ -5497,237 +5059,58 @@
       </p:grpSpPr>
       <p:sp>
         <p:nvSpPr>
-          <p:cNvPr id="10" name="object 10">
+          <p:cNvPr id="2" name="Content Placeholder 1">
             <a:extLst>
               <a:ext uri="{FF2B5EF4-FFF2-40B4-BE49-F238E27FC236}">
-                <a16:creationId xmlns:a16="http://schemas.microsoft.com/office/drawing/2014/main" id="{DBD32444-15FF-AB18-2649-D7E5061F26DB}"/>
+                <a16:creationId xmlns:a16="http://schemas.microsoft.com/office/drawing/2014/main" id="{1FEE8D4C-A3E9-CF6B-A634-C4B2851A1161}"/>
               </a:ext>
             </a:extLst>
           </p:cNvPr>
-          <p:cNvSpPr txBox="1">
-            <a:spLocks/>
+          <p:cNvSpPr>
+            <a:spLocks noGrp="1"/>
           </p:cNvSpPr>
-          <p:nvPr/>
+          <p:nvPr>
+            <p:ph sz="quarter" idx="10"/>
+          </p:nvPr>
         </p:nvSpPr>
-        <p:spPr>
-          <a:xfrm>
-            <a:off x="11423367" y="3411631"/>
-            <a:ext cx="7183656" cy="688650"/>
-          </a:xfrm>
-          <a:prstGeom prst="rect">
-            <a:avLst/>
-          </a:prstGeom>
-        </p:spPr>
+        <p:spPr/>
         <p:txBody>
-          <a:bodyPr vert="horz" wrap="square" lIns="0" tIns="11430" rIns="0" bIns="0" rtlCol="0">
-            <a:spAutoFit/>
-          </a:bodyPr>
-          <a:lstStyle>
-            <a:lvl1pPr>
-              <a:defRPr>
-                <a:latin typeface="+mj-lt"/>
-                <a:ea typeface="+mj-ea"/>
-                <a:cs typeface="+mj-cs"/>
-              </a:defRPr>
-            </a:lvl1pPr>
-          </a:lstStyle>
+          <a:bodyPr/>
+          <a:lstStyle/>
           <a:p>
-            <a:pPr marL="12700">
-              <a:spcBef>
-                <a:spcPts val="90"/>
-              </a:spcBef>
-            </a:pPr>
-            <a:r>
-              <a:rPr lang="en-MY" sz="4400" b="1" spc="-10" dirty="0">
-                <a:solidFill>
-                  <a:srgbClr val="1500D9"/>
-                </a:solidFill>
-                <a:latin typeface="Arial Black" panose="020B0604020202020204" pitchFamily="34" charset="0"/>
-                <a:cs typeface="Arial Black" panose="020B0604020202020204" pitchFamily="34" charset="0"/>
-              </a:rPr>
-              <a:t>Title Placeholder</a:t>
-            </a:r>
-            <a:endParaRPr lang="en-MY" sz="4400" b="1" dirty="0">
-              <a:solidFill>
-                <a:srgbClr val="1500D9"/>
-              </a:solidFill>
-              <a:latin typeface="Arial Black" panose="020B0604020202020204" pitchFamily="34" charset="0"/>
-              <a:cs typeface="Arial Black" panose="020B0604020202020204" pitchFamily="34" charset="0"/>
-            </a:endParaRPr>
+            <a:endParaRPr lang="en-MY"/>
           </a:p>
         </p:txBody>
       </p:sp>
       <p:sp>
         <p:nvSpPr>
-          <p:cNvPr id="12" name="object 12">
+          <p:cNvPr id="3" name="Content Placeholder 2">
             <a:extLst>
               <a:ext uri="{FF2B5EF4-FFF2-40B4-BE49-F238E27FC236}">
-                <a16:creationId xmlns:a16="http://schemas.microsoft.com/office/drawing/2014/main" id="{BC0055CE-824E-E9A5-EAC3-F471B80A2516}"/>
+                <a16:creationId xmlns:a16="http://schemas.microsoft.com/office/drawing/2014/main" id="{9B444D00-C231-1BAC-D2A5-141DC6E5022B}"/>
               </a:ext>
             </a:extLst>
           </p:cNvPr>
-          <p:cNvSpPr txBox="1"/>
-          <p:nvPr/>
+          <p:cNvSpPr>
+            <a:spLocks noGrp="1"/>
+          </p:cNvSpPr>
+          <p:nvPr>
+            <p:ph sz="quarter" idx="11"/>
+          </p:nvPr>
         </p:nvSpPr>
-        <p:spPr>
-          <a:xfrm>
-            <a:off x="11418060" y="6363540"/>
-            <a:ext cx="6819139" cy="444352"/>
-          </a:xfrm>
-          <a:prstGeom prst="rect">
-            <a:avLst/>
-          </a:prstGeom>
-        </p:spPr>
+        <p:spPr/>
         <p:txBody>
-          <a:bodyPr vert="horz" wrap="square" lIns="0" tIns="13335" rIns="0" bIns="0" rtlCol="0">
-            <a:spAutoFit/>
-          </a:bodyPr>
+          <a:bodyPr/>
           <a:lstStyle/>
           <a:p>
-            <a:pPr marL="12700">
-              <a:lnSpc>
-                <a:spcPct val="100000"/>
-              </a:lnSpc>
-              <a:spcBef>
-                <a:spcPts val="105"/>
-              </a:spcBef>
-            </a:pPr>
-            <a:r>
-              <a:rPr lang="en-MY" sz="2800" dirty="0">
-                <a:solidFill>
-                  <a:srgbClr val="FF7900"/>
-                </a:solidFill>
-                <a:latin typeface="Arial"/>
-                <a:cs typeface="Arial"/>
-              </a:rPr>
-              <a:t>Body Placeholder</a:t>
-            </a:r>
-            <a:endParaRPr sz="2800" dirty="0">
-              <a:latin typeface="Arial"/>
-              <a:cs typeface="Arial"/>
-            </a:endParaRPr>
+            <a:endParaRPr lang="en-MY"/>
           </a:p>
         </p:txBody>
       </p:sp>
-      <p:sp>
-        <p:nvSpPr>
-          <p:cNvPr id="13" name="object 13">
-            <a:extLst>
-              <a:ext uri="{FF2B5EF4-FFF2-40B4-BE49-F238E27FC236}">
-                <a16:creationId xmlns:a16="http://schemas.microsoft.com/office/drawing/2014/main" id="{374B7DE7-33F9-F763-E4F6-E5793299E9E4}"/>
-              </a:ext>
-            </a:extLst>
-          </p:cNvPr>
-          <p:cNvSpPr txBox="1"/>
-          <p:nvPr/>
-        </p:nvSpPr>
-        <p:spPr>
-          <a:xfrm>
-            <a:off x="11407886" y="7815695"/>
-            <a:ext cx="3095625" cy="447558"/>
-          </a:xfrm>
-          <a:prstGeom prst="rect">
-            <a:avLst/>
-          </a:prstGeom>
-        </p:spPr>
-        <p:txBody>
-          <a:bodyPr vert="horz" wrap="square" lIns="0" tIns="16510" rIns="0" bIns="0" rtlCol="0">
-            <a:spAutoFit/>
-          </a:bodyPr>
-          <a:lstStyle/>
-          <a:p>
-            <a:pPr marL="12700">
-              <a:lnSpc>
-                <a:spcPct val="100000"/>
-              </a:lnSpc>
-              <a:spcBef>
-                <a:spcPts val="130"/>
-              </a:spcBef>
-            </a:pPr>
-            <a:r>
-              <a:rPr lang="en-US" sz="2800" spc="-10" dirty="0">
-                <a:solidFill>
-                  <a:srgbClr val="1300E2"/>
-                </a:solidFill>
-                <a:latin typeface="Arial"/>
-                <a:cs typeface="Arial"/>
-              </a:rPr>
-              <a:t>Date</a:t>
-            </a:r>
-            <a:endParaRPr sz="2800" dirty="0">
-              <a:latin typeface="Arial"/>
-              <a:cs typeface="Arial"/>
-            </a:endParaRPr>
-          </a:p>
-        </p:txBody>
-      </p:sp>
-      <p:sp>
-        <p:nvSpPr>
-          <p:cNvPr id="8" name="TextBox 7">
-            <a:extLst>
-              <a:ext uri="{FF2B5EF4-FFF2-40B4-BE49-F238E27FC236}">
-                <a16:creationId xmlns:a16="http://schemas.microsoft.com/office/drawing/2014/main" id="{D0857AC4-8EB2-24D5-615A-6B8620E9815E}"/>
-              </a:ext>
-            </a:extLst>
-          </p:cNvPr>
-          <p:cNvSpPr txBox="1"/>
-          <p:nvPr/>
-        </p:nvSpPr>
-        <p:spPr>
-          <a:xfrm>
-            <a:off x="19925414" y="9229060"/>
-            <a:ext cx="184731" cy="369332"/>
-          </a:xfrm>
-          <a:prstGeom prst="rect">
-            <a:avLst/>
-          </a:prstGeom>
-          <a:noFill/>
-        </p:spPr>
-        <p:txBody>
-          <a:bodyPr wrap="none" rtlCol="0">
-            <a:spAutoFit/>
-          </a:bodyPr>
-          <a:lstStyle/>
-          <a:p>
-            <a:endParaRPr lang="en-US" dirty="0"/>
-          </a:p>
-        </p:txBody>
-      </p:sp>
-      <p:pic>
-        <p:nvPicPr>
-          <p:cNvPr id="4" name="Picture 3">
-            <a:extLst>
-              <a:ext uri="{FF2B5EF4-FFF2-40B4-BE49-F238E27FC236}">
-                <a16:creationId xmlns:a16="http://schemas.microsoft.com/office/drawing/2014/main" id="{029FA9C7-F862-B723-1675-3B58D93C2ADE}"/>
-              </a:ext>
-            </a:extLst>
-          </p:cNvPr>
-          <p:cNvPicPr>
-            <a:picLocks noChangeAspect="1"/>
-          </p:cNvPicPr>
-          <p:nvPr/>
-        </p:nvPicPr>
-        <p:blipFill>
-          <a:blip r:embed="rId3"/>
-          <a:srcRect l="772" r="31336" b="986"/>
-          <a:stretch>
-            <a:fillRect/>
-          </a:stretch>
-        </p:blipFill>
-        <p:spPr>
-          <a:xfrm>
-            <a:off x="0" y="0"/>
-            <a:ext cx="10553076" cy="11309350"/>
-          </a:xfrm>
-          <a:prstGeom prst="rect">
-            <a:avLst/>
-          </a:prstGeom>
-        </p:spPr>
-      </p:pic>
     </p:spTree>
     <p:extLst>
       <p:ext uri="{BB962C8B-B14F-4D97-AF65-F5344CB8AC3E}">
-        <p14:creationId xmlns:p14="http://schemas.microsoft.com/office/powerpoint/2010/main" val="4226139492"/>
+        <p14:creationId xmlns:p14="http://schemas.microsoft.com/office/powerpoint/2010/main" val="2043980996"/>
       </p:ext>
     </p:extLst>
   </p:cSld>
@@ -5837,7 +5220,7 @@
           <a:bodyPr/>
           <a:lstStyle/>
           <a:p>
-            <a:endParaRPr lang="en-MY"/>
+            <a:endParaRPr lang="en-MY" dirty="0"/>
           </a:p>
         </p:txBody>
       </p:sp>
@@ -7048,36 +6431,6 @@
 </file>
 
 <file path=customXml/item1.xml><?xml version="1.0" encoding="utf-8"?>
-<p:properties xmlns:p="http://schemas.microsoft.com/office/2006/metadata/properties" xmlns:xsi="http://www.w3.org/2001/XMLSchema-instance" xmlns:pc="http://schemas.microsoft.com/office/infopath/2007/PartnerControls">
-  <documentManagement>
-    <_x0031_0_x002e_ChapGohMei xmlns="35e651f9-793f-4312-ae92-7f999fad73ab" xsi:nil="true"/>
-    <Number xmlns="35e651f9-793f-4312-ae92-7f999fad73ab" xsi:nil="true"/>
-    <TaxCatchAll xmlns="22150af8-2c9a-450b-b521-a068fc3c92bd" xsi:nil="true"/>
-    <lcf76f155ced4ddcb4097134ff3c332f xmlns="35e651f9-793f-4312-ae92-7f999fad73ab">
-      <Terms xmlns="http://schemas.microsoft.com/office/infopath/2007/PartnerControls"/>
-    </lcf76f155ced4ddcb4097134ff3c332f>
-    <SharedWithUsers xmlns="22150af8-2c9a-450b-b521-a068fc3c92bd">
-      <UserInfo>
-        <DisplayName/>
-        <AccountId xsi:nil="true"/>
-        <AccountType/>
-      </UserInfo>
-    </SharedWithUsers>
-    <MediaLengthInSeconds xmlns="35e651f9-793f-4312-ae92-7f999fad73ab" xsi:nil="true"/>
-  </documentManagement>
-</p:properties>
-</file>
-
-<file path=customXml/item2.xml><?xml version="1.0" encoding="utf-8"?>
-<?mso-contentType ?>
-<FormTemplates xmlns="http://schemas.microsoft.com/sharepoint/v3/contenttype/forms">
-  <Display>DocumentLibraryForm</Display>
-  <Edit>DocumentLibraryForm</Edit>
-  <New>DocumentLibraryForm</New>
-</FormTemplates>
-</file>
-
-<file path=customXml/item3.xml><?xml version="1.0" encoding="utf-8"?>
 <ct:contentTypeSchema xmlns:ct="http://schemas.microsoft.com/office/2006/metadata/contentType" xmlns:ma="http://schemas.microsoft.com/office/2006/metadata/properties/metaAttributes" ct:_="" ma:_="" ma:contentTypeName="Document" ma:contentTypeID="0x01010063251A0DD0A77B4FA4B382702A42E782" ma:contentTypeVersion="20" ma:contentTypeDescription="Create a new document." ma:contentTypeScope="" ma:versionID="826a6b8a16673c7e2d43e661c3c2c4de">
   <xsd:schema xmlns:xsd="http://www.w3.org/2001/XMLSchema" xmlns:xs="http://www.w3.org/2001/XMLSchema" xmlns:p="http://schemas.microsoft.com/office/2006/metadata/properties" xmlns:ns2="22150af8-2c9a-450b-b521-a068fc3c92bd" xmlns:ns3="35e651f9-793f-4312-ae92-7f999fad73ab" targetNamespace="http://schemas.microsoft.com/office/2006/metadata/properties" ma:root="true" ma:fieldsID="be0a201336443f390dd15968bc518ad7" ns2:_="" ns3:_="">
     <xsd:import namespace="22150af8-2c9a-450b-b521-a068fc3c92bd"/>
@@ -7340,32 +6693,37 @@
 </ct:contentTypeSchema>
 </file>
 
-<file path=customXml/itemProps1.xml><?xml version="1.0" encoding="utf-8"?>
-<ds:datastoreItem xmlns:ds="http://schemas.openxmlformats.org/officeDocument/2006/customXml" ds:itemID="{1FBFD6F2-3D17-43CC-9112-DD78A27F3E92}">
-  <ds:schemaRefs>
-    <ds:schemaRef ds:uri="http://www.w3.org/XML/1998/namespace"/>
-    <ds:schemaRef ds:uri="http://purl.org/dc/terms/"/>
-    <ds:schemaRef ds:uri="35e651f9-793f-4312-ae92-7f999fad73ab"/>
-    <ds:schemaRef ds:uri="http://purl.org/dc/dcmitype/"/>
-    <ds:schemaRef ds:uri="http://schemas.microsoft.com/office/infopath/2007/PartnerControls"/>
-    <ds:schemaRef ds:uri="http://schemas.microsoft.com/office/2006/documentManagement/types"/>
-    <ds:schemaRef ds:uri="http://schemas.openxmlformats.org/package/2006/metadata/core-properties"/>
-    <ds:schemaRef ds:uri="22150af8-2c9a-450b-b521-a068fc3c92bd"/>
-    <ds:schemaRef ds:uri="http://schemas.microsoft.com/office/2006/metadata/properties"/>
-    <ds:schemaRef ds:uri="http://purl.org/dc/elements/1.1/"/>
-  </ds:schemaRefs>
-</ds:datastoreItem>
+<file path=customXml/item2.xml><?xml version="1.0" encoding="utf-8"?>
+<?mso-contentType ?>
+<FormTemplates xmlns="http://schemas.microsoft.com/sharepoint/v3/contenttype/forms">
+  <Display>DocumentLibraryForm</Display>
+  <Edit>DocumentLibraryForm</Edit>
+  <New>DocumentLibraryForm</New>
+</FormTemplates>
 </file>
 
-<file path=customXml/itemProps2.xml><?xml version="1.0" encoding="utf-8"?>
-<ds:datastoreItem xmlns:ds="http://schemas.openxmlformats.org/officeDocument/2006/customXml" ds:itemID="{0766029B-5488-44E8-82E9-63D46611247A}">
-  <ds:schemaRefs>
-    <ds:schemaRef ds:uri="http://schemas.microsoft.com/sharepoint/v3/contenttype/forms"/>
-  </ds:schemaRefs>
-</ds:datastoreItem>
+<file path=customXml/item3.xml><?xml version="1.0" encoding="utf-8"?>
+<p:properties xmlns:p="http://schemas.microsoft.com/office/2006/metadata/properties" xmlns:xsi="http://www.w3.org/2001/XMLSchema-instance" xmlns:pc="http://schemas.microsoft.com/office/infopath/2007/PartnerControls">
+  <documentManagement>
+    <_x0031_0_x002e_ChapGohMei xmlns="35e651f9-793f-4312-ae92-7f999fad73ab" xsi:nil="true"/>
+    <Number xmlns="35e651f9-793f-4312-ae92-7f999fad73ab" xsi:nil="true"/>
+    <TaxCatchAll xmlns="22150af8-2c9a-450b-b521-a068fc3c92bd" xsi:nil="true"/>
+    <lcf76f155ced4ddcb4097134ff3c332f xmlns="35e651f9-793f-4312-ae92-7f999fad73ab">
+      <Terms xmlns="http://schemas.microsoft.com/office/infopath/2007/PartnerControls"/>
+    </lcf76f155ced4ddcb4097134ff3c332f>
+    <SharedWithUsers xmlns="22150af8-2c9a-450b-b521-a068fc3c92bd">
+      <UserInfo>
+        <DisplayName/>
+        <AccountId xsi:nil="true"/>
+        <AccountType/>
+      </UserInfo>
+    </SharedWithUsers>
+    <MediaLengthInSeconds xmlns="35e651f9-793f-4312-ae92-7f999fad73ab" xsi:nil="true"/>
+  </documentManagement>
+</p:properties>
 </file>
 
-<file path=customXml/itemProps3.xml><?xml version="1.0" encoding="utf-8"?>
+<file path=customXml/itemProps1.xml><?xml version="1.0" encoding="utf-8"?>
 <ds:datastoreItem xmlns:ds="http://schemas.openxmlformats.org/officeDocument/2006/customXml" ds:itemID="{6AA4BC76-E1EF-4E16-A7A9-437744E8D4BD}">
   <ds:schemaRefs>
     <ds:schemaRef ds:uri="http://schemas.microsoft.com/office/2006/metadata/contentType"/>
@@ -7382,4 +6740,29 @@
     <ds:schemaRef ds:uri="http://schemas.microsoft.com/internal/obd"/>
   </ds:schemaRefs>
 </ds:datastoreItem>
+</file>
+
+<file path=customXml/itemProps2.xml><?xml version="1.0" encoding="utf-8"?>
+<ds:datastoreItem xmlns:ds="http://schemas.openxmlformats.org/officeDocument/2006/customXml" ds:itemID="{0766029B-5488-44E8-82E9-63D46611247A}">
+  <ds:schemaRefs>
+    <ds:schemaRef ds:uri="http://schemas.microsoft.com/sharepoint/v3/contenttype/forms"/>
+  </ds:schemaRefs>
+</ds:datastoreItem>
+</file>
+
+<file path=customXml/itemProps3.xml><?xml version="1.0" encoding="utf-8"?>
+<ds:datastoreItem xmlns:ds="http://schemas.openxmlformats.org/officeDocument/2006/customXml" ds:itemID="{1FBFD6F2-3D17-43CC-9112-DD78A27F3E92}">
+  <ds:schemaRefs>
+    <ds:schemaRef ds:uri="http://www.w3.org/XML/1998/namespace"/>
+    <ds:schemaRef ds:uri="http://purl.org/dc/terms/"/>
+    <ds:schemaRef ds:uri="35e651f9-793f-4312-ae92-7f999fad73ab"/>
+    <ds:schemaRef ds:uri="http://purl.org/dc/dcmitype/"/>
+    <ds:schemaRef ds:uri="http://schemas.microsoft.com/office/infopath/2007/PartnerControls"/>
+    <ds:schemaRef ds:uri="http://schemas.microsoft.com/office/2006/documentManagement/types"/>
+    <ds:schemaRef ds:uri="http://schemas.openxmlformats.org/package/2006/metadata/core-properties"/>
+    <ds:schemaRef ds:uri="22150af8-2c9a-450b-b521-a068fc3c92bd"/>
+    <ds:schemaRef ds:uri="http://schemas.microsoft.com/office/2006/metadata/properties"/>
+    <ds:schemaRef ds:uri="http://purl.org/dc/elements/1.1/"/>
+  </ds:schemaRefs>
+</ds:datastoreItem>
 </file>